--- a/Презентация.pptx
+++ b/Презентация.pptx
@@ -259,8 +259,11 @@
     </a:lvl9pPr>
   </p:defaultTextStyle>
   <p:extLst>
+    <p:ext uri="{EFAFB233-063F-42B5-8137-9DF3F51BA10A}">
+      <p15:sldGuideLst xmlns:p15="http://schemas.microsoft.com/office/powerpoint/2012/main"/>
+    </p:ext>
     <p:ext uri="GoogleSlidesCustomDataVersion2">
-      <go:slidesCustomData xmlns:go="http://customooxmlschemas.google.com/" xmlns:ahyp="http://schemas.microsoft.com/office/drawing/2018/hyperlinkcolor" xmlns:p15="http://schemas.microsoft.com/office/powerpoint/2012/main" xmlns:p14="http://schemas.microsoft.com/office/powerpoint/2010/main" xmlns:com="http://schemas.openxmlformats.org/drawingml/2006/compatibility" xmlns:pvml="urn:schemas-microsoft-com:office:powerpoint" xmlns:v="urn:schemas-microsoft-com:vml" xmlns:o="urn:schemas-microsoft-com:office:office" xmlns:dgm="http://schemas.openxmlformats.org/drawingml/2006/diagram" xmlns:c="http://schemas.openxmlformats.org/drawingml/2006/chart" xmlns:mv="urn:schemas-microsoft-com:mac:vml" xmlns:mc="http://schemas.openxmlformats.org/markup-compatibility/2006" xmlns="" r:id="rId22" roundtripDataSignature="AMtx7mharbfQEYbbpYXAVs4aKxEcWf71Rg=="/>
+      <go:slidesCustomData xmlns="" xmlns:mc="http://schemas.openxmlformats.org/markup-compatibility/2006" xmlns:mv="urn:schemas-microsoft-com:mac:vml" xmlns:c="http://schemas.openxmlformats.org/drawingml/2006/chart" xmlns:dgm="http://schemas.openxmlformats.org/drawingml/2006/diagram" xmlns:o="urn:schemas-microsoft-com:office:office" xmlns:v="urn:schemas-microsoft-com:vml" xmlns:pvml="urn:schemas-microsoft-com:office:powerpoint" xmlns:com="http://schemas.openxmlformats.org/drawingml/2006/compatibility" xmlns:p14="http://schemas.microsoft.com/office/powerpoint/2010/main" xmlns:p15="http://schemas.microsoft.com/office/powerpoint/2012/main" xmlns:ahyp="http://schemas.microsoft.com/office/drawing/2018/hyperlinkcolor" xmlns:go="http://customooxmlschemas.google.com/" r:id="rId22" roundtripDataSignature="AMtx7mharbfQEYbbpYXAVs4aKxEcWf71Rg=="/>
     </p:ext>
   </p:extLst>
 </p:presentation>
@@ -15370,7 +15373,7 @@
               <a:buNone/>
             </a:pPr>
             <a:r>
-              <a:rPr lang="en-US" sz="1450" b="0" i="0" u="none" strike="noStrike" cap="none">
+              <a:rPr lang="en-US" sz="1450" b="0" i="0" u="none" strike="noStrike" cap="none" dirty="0" err="1">
                 <a:solidFill>
                   <a:srgbClr val="374151"/>
                 </a:solidFill>
@@ -15379,9 +15382,153 @@
                 <a:cs typeface="Calibri"/>
                 <a:sym typeface="Calibri"/>
               </a:rPr>
-              <a:t>Роли: Admin управляет справочниками; User запускает симуляции и смотрит результаты.</a:t>
-            </a:r>
-            <a:endParaRPr sz="1450" b="0" i="0" u="none" strike="noStrike" cap="none">
+              <a:t>Роли</a:t>
+            </a:r>
+            <a:r>
+              <a:rPr lang="en-US" sz="1450" b="0" i="0" u="none" strike="noStrike" cap="none" dirty="0">
+                <a:solidFill>
+                  <a:srgbClr val="374151"/>
+                </a:solidFill>
+                <a:latin typeface="Calibri"/>
+                <a:ea typeface="Calibri"/>
+                <a:cs typeface="Calibri"/>
+                <a:sym typeface="Calibri"/>
+              </a:rPr>
+              <a:t>: Admin </a:t>
+            </a:r>
+            <a:r>
+              <a:rPr lang="en-US" sz="1450" b="0" i="0" u="none" strike="noStrike" cap="none" dirty="0" err="1">
+                <a:solidFill>
+                  <a:srgbClr val="374151"/>
+                </a:solidFill>
+                <a:latin typeface="Calibri"/>
+                <a:ea typeface="Calibri"/>
+                <a:cs typeface="Calibri"/>
+                <a:sym typeface="Calibri"/>
+              </a:rPr>
+              <a:t>управляет</a:t>
+            </a:r>
+            <a:r>
+              <a:rPr lang="en-US" sz="1450" b="0" i="0" u="none" strike="noStrike" cap="none" dirty="0">
+                <a:solidFill>
+                  <a:srgbClr val="374151"/>
+                </a:solidFill>
+                <a:latin typeface="Calibri"/>
+                <a:ea typeface="Calibri"/>
+                <a:cs typeface="Calibri"/>
+                <a:sym typeface="Calibri"/>
+              </a:rPr>
+              <a:t> </a:t>
+            </a:r>
+            <a:r>
+              <a:rPr lang="en-US" sz="1450" b="0" i="0" u="none" strike="noStrike" cap="none" dirty="0" err="1">
+                <a:solidFill>
+                  <a:srgbClr val="374151"/>
+                </a:solidFill>
+                <a:latin typeface="Calibri"/>
+                <a:ea typeface="Calibri"/>
+                <a:cs typeface="Calibri"/>
+                <a:sym typeface="Calibri"/>
+              </a:rPr>
+              <a:t>справочниками</a:t>
+            </a:r>
+            <a:r>
+              <a:rPr lang="en-US" sz="1450" b="0" i="0" u="none" strike="noStrike" cap="none" dirty="0">
+                <a:solidFill>
+                  <a:srgbClr val="374151"/>
+                </a:solidFill>
+                <a:latin typeface="Calibri"/>
+                <a:ea typeface="Calibri"/>
+                <a:cs typeface="Calibri"/>
+                <a:sym typeface="Calibri"/>
+              </a:rPr>
+              <a:t>; User </a:t>
+            </a:r>
+            <a:r>
+              <a:rPr lang="en-US" sz="1450" b="0" i="0" u="none" strike="noStrike" cap="none" dirty="0" err="1">
+                <a:solidFill>
+                  <a:srgbClr val="374151"/>
+                </a:solidFill>
+                <a:latin typeface="Calibri"/>
+                <a:ea typeface="Calibri"/>
+                <a:cs typeface="Calibri"/>
+                <a:sym typeface="Calibri"/>
+              </a:rPr>
+              <a:t>запускает</a:t>
+            </a:r>
+            <a:r>
+              <a:rPr lang="en-US" sz="1450" b="0" i="0" u="none" strike="noStrike" cap="none" dirty="0">
+                <a:solidFill>
+                  <a:srgbClr val="374151"/>
+                </a:solidFill>
+                <a:latin typeface="Calibri"/>
+                <a:ea typeface="Calibri"/>
+                <a:cs typeface="Calibri"/>
+                <a:sym typeface="Calibri"/>
+              </a:rPr>
+              <a:t> </a:t>
+            </a:r>
+            <a:r>
+              <a:rPr lang="en-US" sz="1450" b="0" i="0" u="none" strike="noStrike" cap="none" dirty="0" err="1">
+                <a:solidFill>
+                  <a:srgbClr val="374151"/>
+                </a:solidFill>
+                <a:latin typeface="Calibri"/>
+                <a:ea typeface="Calibri"/>
+                <a:cs typeface="Calibri"/>
+                <a:sym typeface="Calibri"/>
+              </a:rPr>
+              <a:t>симуляции</a:t>
+            </a:r>
+            <a:r>
+              <a:rPr lang="en-US" sz="1450" b="0" i="0" u="none" strike="noStrike" cap="none" dirty="0">
+                <a:solidFill>
+                  <a:srgbClr val="374151"/>
+                </a:solidFill>
+                <a:latin typeface="Calibri"/>
+                <a:ea typeface="Calibri"/>
+                <a:cs typeface="Calibri"/>
+                <a:sym typeface="Calibri"/>
+              </a:rPr>
+              <a:t> и </a:t>
+            </a:r>
+            <a:r>
+              <a:rPr lang="en-US" sz="1450" b="0" i="0" u="none" strike="noStrike" cap="none" dirty="0" err="1">
+                <a:solidFill>
+                  <a:srgbClr val="374151"/>
+                </a:solidFill>
+                <a:latin typeface="Calibri"/>
+                <a:ea typeface="Calibri"/>
+                <a:cs typeface="Calibri"/>
+                <a:sym typeface="Calibri"/>
+              </a:rPr>
+              <a:t>смотрит</a:t>
+            </a:r>
+            <a:r>
+              <a:rPr lang="en-US" sz="1450" b="0" i="0" u="none" strike="noStrike" cap="none" dirty="0">
+                <a:solidFill>
+                  <a:srgbClr val="374151"/>
+                </a:solidFill>
+                <a:latin typeface="Calibri"/>
+                <a:ea typeface="Calibri"/>
+                <a:cs typeface="Calibri"/>
+                <a:sym typeface="Calibri"/>
+              </a:rPr>
+              <a:t> </a:t>
+            </a:r>
+            <a:r>
+              <a:rPr lang="en-US" sz="1450" b="0" i="0" u="none" strike="noStrike" cap="none" dirty="0" err="1">
+                <a:solidFill>
+                  <a:srgbClr val="374151"/>
+                </a:solidFill>
+                <a:latin typeface="Calibri"/>
+                <a:ea typeface="Calibri"/>
+                <a:cs typeface="Calibri"/>
+                <a:sym typeface="Calibri"/>
+              </a:rPr>
+              <a:t>результаты</a:t>
+            </a:r>
+            <a:endParaRPr sz="1450" b="0" i="0" u="none" strike="noStrike" cap="none" dirty="0">
               <a:solidFill>
                 <a:schemeClr val="dk1"/>
               </a:solidFill>
@@ -28690,232 +28837,171 @@
       </p:grpSpPr>
       <p:sp>
         <p:nvSpPr>
-          <p:cNvPr id="217" name="Google Shape;217;p8"/>
-          <p:cNvSpPr/>
+          <p:cNvPr id="2" name="TextBox 1"/>
+          <p:cNvSpPr txBox="1"/>
           <p:nvPr/>
         </p:nvSpPr>
         <p:spPr>
           <a:xfrm>
             <a:off x="502920" y="320040"/>
-            <a:ext cx="9966960" cy="502920"/>
+            <a:ext cx="8046720" cy="411480"/>
           </a:xfrm>
           <a:prstGeom prst="rect">
             <a:avLst/>
           </a:prstGeom>
           <a:noFill/>
-          <a:ln>
-            <a:noFill/>
-          </a:ln>
-        </p:spPr>
-        <p:txBody>
-          <a:bodyPr spcFirstLastPara="1" wrap="square" lIns="0" tIns="0" rIns="0" bIns="0" anchor="ctr" anchorCtr="0">
-            <a:noAutofit/>
-          </a:bodyPr>
-          <a:lstStyle/>
-          <a:p>
-            <a:pPr marL="0" marR="0" lvl="0" indent="0" algn="l" rtl="0">
-              <a:spcBef>
-                <a:spcPts val="0"/>
-              </a:spcBef>
-              <a:spcAft>
-                <a:spcPts val="0"/>
-              </a:spcAft>
-              <a:buClr>
-                <a:srgbClr val="111827"/>
-              </a:buClr>
-              <a:buSzPts val="2700"/>
-              <a:buFont typeface="Calibri"/>
-              <a:buNone/>
-            </a:pPr>
-            <a:r>
-              <a:rPr lang="en-US" sz="2700" b="1" i="0" u="none" strike="noStrike" cap="none">
+        </p:spPr>
+        <p:txBody>
+          <a:bodyPr wrap="none" lIns="0" tIns="0" rIns="0" bIns="0">
+            <a:spAutoFit/>
+          </a:bodyPr>
+          <a:lstStyle/>
+          <a:p>
+            <a:pPr algn="l"/>
+            <a:r>
+              <a:rPr sz="2400" b="1">
                 <a:solidFill>
                   <a:srgbClr val="111827"/>
                 </a:solidFill>
-                <a:latin typeface="Calibri"/>
-                <a:ea typeface="Calibri"/>
-                <a:cs typeface="Calibri"/>
-                <a:sym typeface="Calibri"/>
               </a:rPr>
               <a:t>Диаграмма базы данных</a:t>
             </a:r>
-            <a:endParaRPr sz="2700" b="0" i="0" u="none" strike="noStrike" cap="none">
+          </a:p>
+        </p:txBody>
+      </p:sp>
+      <p:sp>
+        <p:nvSpPr>
+          <p:cNvPr id="3" name="TextBox 2"/>
+          <p:cNvSpPr txBox="1"/>
+          <p:nvPr/>
+        </p:nvSpPr>
+        <p:spPr>
+          <a:xfrm>
+            <a:off x="548640" y="804672"/>
+            <a:ext cx="9144000" cy="228600"/>
+          </a:xfrm>
+          <a:prstGeom prst="rect">
+            <a:avLst/>
+          </a:prstGeom>
+          <a:noFill/>
+        </p:spPr>
+        <p:txBody>
+          <a:bodyPr wrap="none" lIns="0" tIns="0" rIns="0" bIns="0">
+            <a:spAutoFit/>
+          </a:bodyPr>
+          <a:lstStyle/>
+          <a:p>
+            <a:pPr algn="l"/>
+            <a:r>
+              <a:rPr sz="1100" b="0">
+                <a:solidFill>
+                  <a:srgbClr val="475569"/>
+                </a:solidFill>
+              </a:rPr>
+              <a:t>Предметные таблицы, результаты расчётов и основные связи между ними</a:t>
+            </a:r>
+          </a:p>
+        </p:txBody>
+      </p:sp>
+      <p:sp>
+        <p:nvSpPr>
+          <p:cNvPr id="5" name="TextBox 4"/>
+          <p:cNvSpPr txBox="1"/>
+          <p:nvPr/>
+        </p:nvSpPr>
+        <p:spPr>
+          <a:xfrm>
+            <a:off x="11384280" y="6428232"/>
+            <a:ext cx="182880" cy="164592"/>
+          </a:xfrm>
+          <a:prstGeom prst="rect">
+            <a:avLst/>
+          </a:prstGeom>
+          <a:noFill/>
+        </p:spPr>
+        <p:txBody>
+          <a:bodyPr wrap="none" lIns="0" tIns="0" rIns="0" bIns="0">
+            <a:spAutoFit/>
+          </a:bodyPr>
+          <a:lstStyle/>
+          <a:p>
+            <a:pPr algn="l"/>
+            <a:r>
+              <a:rPr sz="700" b="0">
+                <a:solidFill>
+                  <a:srgbClr val="475569"/>
+                </a:solidFill>
+              </a:rPr>
+              <a:t>8</a:t>
+            </a:r>
+          </a:p>
+        </p:txBody>
+      </p:sp>
+      <p:sp>
+        <p:nvSpPr>
+          <p:cNvPr id="7" name="TextBox 6"/>
+          <p:cNvSpPr txBox="1"/>
+          <p:nvPr/>
+        </p:nvSpPr>
+        <p:spPr>
+          <a:xfrm>
+            <a:off x="539496" y="1197864"/>
+            <a:ext cx="1158972" cy="123111"/>
+          </a:xfrm>
+          <a:prstGeom prst="rect">
+            <a:avLst/>
+          </a:prstGeom>
+          <a:noFill/>
+        </p:spPr>
+        <p:txBody>
+          <a:bodyPr wrap="none" lIns="0" tIns="0" rIns="0" bIns="0">
+            <a:spAutoFit/>
+          </a:bodyPr>
+          <a:lstStyle/>
+          <a:p>
+            <a:pPr algn="l"/>
+            <a:r>
+              <a:rPr sz="800" b="1" dirty="0" err="1">
+                <a:solidFill>
+                  <a:srgbClr val="059669"/>
+                </a:solidFill>
+              </a:rPr>
+              <a:t>Предметные</a:t>
+            </a:r>
+            <a:r>
+              <a:rPr sz="800" b="1" dirty="0">
+                <a:solidFill>
+                  <a:srgbClr val="059669"/>
+                </a:solidFill>
+              </a:rPr>
+              <a:t> </a:t>
+            </a:r>
+            <a:r>
+              <a:rPr sz="800" b="1" dirty="0" err="1">
+                <a:solidFill>
+                  <a:srgbClr val="059669"/>
+                </a:solidFill>
+              </a:rPr>
+              <a:t>таблицы</a:t>
+            </a:r>
+            <a:endParaRPr sz="800" b="1" dirty="0">
               <a:solidFill>
-                <a:schemeClr val="dk1"/>
+                <a:srgbClr val="059669"/>
               </a:solidFill>
-              <a:latin typeface="Calibri"/>
-              <a:ea typeface="Calibri"/>
-              <a:cs typeface="Calibri"/>
-              <a:sym typeface="Calibri"/>
             </a:endParaRPr>
           </a:p>
         </p:txBody>
       </p:sp>
       <p:sp>
         <p:nvSpPr>
-          <p:cNvPr id="218" name="Google Shape;218;p8"/>
-          <p:cNvSpPr/>
-          <p:nvPr/>
-        </p:nvSpPr>
-        <p:spPr>
-          <a:xfrm>
-            <a:off x="530352" y="841248"/>
-            <a:ext cx="10698480" cy="310896"/>
-          </a:xfrm>
-          <a:prstGeom prst="rect">
-            <a:avLst/>
-          </a:prstGeom>
-          <a:noFill/>
-          <a:ln>
-            <a:noFill/>
-          </a:ln>
-        </p:spPr>
-        <p:txBody>
-          <a:bodyPr spcFirstLastPara="1" wrap="square" lIns="36576" tIns="18288" rIns="36576" bIns="18288" anchor="ctr" anchorCtr="0">
-            <a:noAutofit/>
-          </a:bodyPr>
-          <a:lstStyle/>
-          <a:p>
-            <a:pPr marL="0" marR="0" lvl="0" indent="0" algn="l" rtl="0">
-              <a:spcBef>
-                <a:spcPts val="0"/>
-              </a:spcBef>
-              <a:spcAft>
-                <a:spcPts val="0"/>
-              </a:spcAft>
-              <a:buClr>
-                <a:srgbClr val="4B5563"/>
-              </a:buClr>
-              <a:buSzPts val="1350"/>
-              <a:buFont typeface="Calibri"/>
-              <a:buNone/>
-            </a:pPr>
-            <a:r>
-              <a:rPr sz="1200" b="0">
-                <a:solidFill>
-                  <a:srgbClr val="475569"/>
-                </a:solidFill>
-                <a:latin typeface="Calibri"/>
-              </a:rPr>
-              <a:t>Все таблицы БД и основные связи между ними</a:t>
-            </a:r>
-            <a:endParaRPr sz="1350" b="0" i="0" u="none" strike="noStrike" cap="none">
-              <a:solidFill>
-                <a:schemeClr val="dk1"/>
-              </a:solidFill>
-              <a:latin typeface="Calibri"/>
-              <a:ea typeface="Calibri"/>
-              <a:cs typeface="Calibri"/>
-              <a:sym typeface="Calibri"/>
-            </a:endParaRPr>
-          </a:p>
-        </p:txBody>
-      </p:sp>
-      <p:sp>
-        <p:nvSpPr>
-          <p:cNvPr id="256" name="Google Shape;256;p8"/>
-          <p:cNvSpPr/>
-          <p:nvPr/>
-        </p:nvSpPr>
-        <p:spPr>
-          <a:xfrm>
-            <a:off x="11292840" y="6446520"/>
-            <a:ext cx="365760" cy="228600"/>
-          </a:xfrm>
-          <a:prstGeom prst="rect">
-            <a:avLst/>
-          </a:prstGeom>
-          <a:noFill/>
-          <a:ln>
-            <a:noFill/>
-          </a:ln>
-        </p:spPr>
-        <p:txBody>
-          <a:bodyPr spcFirstLastPara="1" wrap="square" lIns="27432" tIns="0" rIns="27432" bIns="0" anchor="ctr" anchorCtr="0">
-            <a:noAutofit/>
-          </a:bodyPr>
-          <a:lstStyle/>
-          <a:p>
-            <a:pPr marL="0" marR="0" lvl="0" indent="0" algn="ctr" rtl="0">
-              <a:spcBef>
-                <a:spcPts val="0"/>
-              </a:spcBef>
-              <a:spcAft>
-                <a:spcPts val="0"/>
-              </a:spcAft>
-              <a:buClr>
-                <a:srgbClr val="6B7280"/>
-              </a:buClr>
-              <a:buSzPts val="900"/>
-              <a:buFont typeface="Calibri"/>
-              <a:buNone/>
-            </a:pPr>
-            <a:r>
-              <a:rPr sz="900" b="0">
-                <a:solidFill>
-                  <a:srgbClr val="475569"/>
-                </a:solidFill>
-                <a:latin typeface="Calibri"/>
-              </a:rPr>
-              <a:t>8</a:t>
-            </a:r>
-            <a:endParaRPr sz="900" b="0" i="0" u="none" strike="noStrike" cap="none">
-              <a:solidFill>
-                <a:schemeClr val="dk1"/>
-              </a:solidFill>
-              <a:latin typeface="Calibri"/>
-              <a:ea typeface="Calibri"/>
-              <a:cs typeface="Calibri"/>
-              <a:sym typeface="Calibri"/>
-            </a:endParaRPr>
-          </a:p>
-        </p:txBody>
-      </p:sp>
-      <p:sp>
-        <p:nvSpPr>
-          <p:cNvPr id="257" name="TextBox 256"/>
-          <p:cNvSpPr txBox="1"/>
-          <p:nvPr/>
-        </p:nvSpPr>
-        <p:spPr>
-          <a:xfrm>
-            <a:off x="594360" y="1051560"/>
-            <a:ext cx="10972800" cy="201168"/>
-          </a:xfrm>
-          <a:prstGeom prst="rect">
-            <a:avLst/>
-          </a:prstGeom>
-          <a:noFill/>
-        </p:spPr>
-        <p:txBody>
-          <a:bodyPr wrap="none" lIns="36576" tIns="18288" rIns="36576" bIns="18288">
-            <a:spAutoFit/>
-          </a:bodyPr>
-          <a:lstStyle/>
-          <a:p>
-            <a:pPr algn="l"/>
-            <a:r>
-              <a:rPr sz="800" b="0">
-                <a:solidFill>
-                  <a:srgbClr val="475569"/>
-                </a:solidFill>
-                <a:latin typeface="Calibri"/>
-              </a:rPr>
-              <a:t>Все таблицы показаны отдельно; типы связей указаны в виде: Таблица —1:N→ Таблица.</a:t>
-            </a:r>
-          </a:p>
-        </p:txBody>
-      </p:sp>
-      <p:sp>
-        <p:nvSpPr>
-          <p:cNvPr id="258" name="Rounded Rectangle 257"/>
-          <p:cNvSpPr/>
-          <p:nvPr/>
-        </p:nvSpPr>
-        <p:spPr>
-          <a:xfrm>
-            <a:off x="548640" y="1325880"/>
-            <a:ext cx="5623560" cy="1965960"/>
+          <p:cNvPr id="8" name="Rounded Rectangle 7"/>
+          <p:cNvSpPr/>
+          <p:nvPr/>
+        </p:nvSpPr>
+        <p:spPr>
+          <a:xfrm>
+            <a:off x="502920" y="4060445"/>
+            <a:ext cx="10012680" cy="758952"/>
           </a:xfrm>
           <a:prstGeom prst="roundRect">
             <a:avLst/>
@@ -28923,7 +29009,7 @@
           <a:solidFill>
             <a:srgbClr val="F8FAFC"/>
           </a:solidFill>
-          <a:ln w="10160">
+          <a:ln w="15240">
             <a:solidFill>
               <a:srgbClr val="CBD5E1"/>
             </a:solidFill>
@@ -28954,14 +29040,14 @@
       </p:sp>
       <p:sp>
         <p:nvSpPr>
-          <p:cNvPr id="259" name="TextBox 258"/>
+          <p:cNvPr id="9" name="TextBox 8"/>
           <p:cNvSpPr txBox="1"/>
           <p:nvPr/>
         </p:nvSpPr>
         <p:spPr>
           <a:xfrm>
-            <a:off x="658368" y="1389888"/>
-            <a:ext cx="5404104" cy="182880"/>
+            <a:off x="630936" y="4133597"/>
+            <a:ext cx="9756648" cy="182880"/>
           </a:xfrm>
           <a:prstGeom prst="rect">
             <a:avLst/>
@@ -28969,34 +29055,39 @@
           <a:noFill/>
         </p:spPr>
         <p:txBody>
-          <a:bodyPr wrap="none" lIns="36576" tIns="18288" rIns="36576" bIns="18288">
+          <a:bodyPr wrap="none" lIns="0" tIns="0" rIns="0" bIns="0">
             <a:spAutoFit/>
           </a:bodyPr>
           <a:lstStyle/>
           <a:p>
             <a:pPr algn="l"/>
             <a:r>
-              <a:rPr sz="850" b="1">
-                <a:solidFill>
-                  <a:srgbClr val="047857"/>
-                </a:solidFill>
-                <a:latin typeface="Calibri"/>
-              </a:rPr>
-              <a:t>Предметные таблицы</a:t>
-            </a:r>
-          </a:p>
-        </p:txBody>
-      </p:sp>
-      <p:sp>
-        <p:nvSpPr>
-          <p:cNvPr id="260" name="Rounded Rectangle 259"/>
-          <p:cNvSpPr/>
-          <p:nvPr/>
-        </p:nvSpPr>
-        <p:spPr>
-          <a:xfrm>
-            <a:off x="6355080" y="1325880"/>
-            <a:ext cx="1874519" cy="1965960"/>
+              <a:rPr sz="800" b="1">
+                <a:solidFill>
+                  <a:srgbClr val="475569"/>
+                </a:solidFill>
+              </a:rPr>
+              <a:t>Служебные таблицы</a:t>
+            </a:r>
+          </a:p>
+        </p:txBody>
+      </p:sp>
+      <p:sp>
+        <p:nvSpPr>
+          <p:cNvPr id="91" name="Rounded Rectangle 7">
+            <a:extLst>
+              <a:ext uri="{FF2B5EF4-FFF2-40B4-BE49-F238E27FC236}">
+                <a16:creationId xmlns:a16="http://schemas.microsoft.com/office/drawing/2014/main" id="{D92F5D66-54DC-41C5-9971-654875279DFD}"/>
+              </a:ext>
+            </a:extLst>
+          </p:cNvPr>
+          <p:cNvSpPr/>
+          <p:nvPr/>
+        </p:nvSpPr>
+        <p:spPr>
+          <a:xfrm>
+            <a:off x="502920" y="1393697"/>
+            <a:ext cx="10012680" cy="2593596"/>
           </a:xfrm>
           <a:prstGeom prst="roundRect">
             <a:avLst/>
@@ -29004,7 +29095,7 @@
           <a:solidFill>
             <a:srgbClr val="F8FAFC"/>
           </a:solidFill>
-          <a:ln w="10160">
+          <a:ln w="15240">
             <a:solidFill>
               <a:srgbClr val="CBD5E1"/>
             </a:solidFill>
@@ -29035,14 +29126,14 @@
       </p:sp>
       <p:sp>
         <p:nvSpPr>
-          <p:cNvPr id="261" name="TextBox 260"/>
+          <p:cNvPr id="85" name="TextBox 84"/>
           <p:cNvSpPr txBox="1"/>
           <p:nvPr/>
         </p:nvSpPr>
         <p:spPr>
           <a:xfrm>
-            <a:off x="6464808" y="1389888"/>
-            <a:ext cx="1655063" cy="182880"/>
+            <a:off x="731520" y="4389629"/>
+            <a:ext cx="9418320" cy="219456"/>
           </a:xfrm>
           <a:prstGeom prst="rect">
             <a:avLst/>
@@ -29050,44 +29141,596 @@
           <a:noFill/>
         </p:spPr>
         <p:txBody>
-          <a:bodyPr wrap="none" lIns="36576" tIns="18288" rIns="36576" bIns="18288">
+          <a:bodyPr wrap="none" lIns="0" tIns="0" rIns="0" bIns="0">
             <a:spAutoFit/>
           </a:bodyPr>
           <a:lstStyle/>
           <a:p>
             <a:pPr algn="l"/>
             <a:r>
-              <a:rPr sz="850" b="1">
-                <a:solidFill>
-                  <a:srgbClr val="B91C1C"/>
-                </a:solidFill>
-                <a:latin typeface="Calibri"/>
-              </a:rPr>
-              <a:t>Результаты расчётов</a:t>
-            </a:r>
-          </a:p>
-        </p:txBody>
-      </p:sp>
-      <p:sp>
-        <p:nvSpPr>
-          <p:cNvPr id="262" name="Rounded Rectangle 261"/>
-          <p:cNvSpPr/>
-          <p:nvPr/>
-        </p:nvSpPr>
-        <p:spPr>
-          <a:xfrm>
-            <a:off x="8458200" y="1325880"/>
-            <a:ext cx="3063240" cy="1965960"/>
+              <a:rPr sz="700" b="0">
+                <a:solidFill>
+                  <a:srgbClr val="475569"/>
+                </a:solidFill>
+              </a:rPr>
+              <a:t>Identity: AspNetUsers, AspNetRoles и связанные таблицы ролей/claims/tokens; EF Core / SQLite: __EFMigrationsHistory, __EFMigrationsLock, sqlite_sequence.</a:t>
+            </a:r>
+          </a:p>
+        </p:txBody>
+      </p:sp>
+      <p:cxnSp>
+        <p:nvCxnSpPr>
+          <p:cNvPr id="12" name="Connector 11"/>
+          <p:cNvCxnSpPr/>
+          <p:nvPr/>
+        </p:nvCxnSpPr>
+        <p:spPr>
+          <a:xfrm>
+            <a:off x="1627632" y="1650492"/>
+            <a:ext cx="201168" cy="0"/>
+          </a:xfrm>
+          <a:prstGeom prst="line">
+            <a:avLst/>
+          </a:prstGeom>
+          <a:ln w="11430">
+            <a:solidFill>
+              <a:srgbClr val="475569"/>
+            </a:solidFill>
+            <a:tailEnd type="triangle"/>
+          </a:ln>
+        </p:spPr>
+        <p:style>
+          <a:lnRef idx="2">
+            <a:schemeClr val="accent1"/>
+          </a:lnRef>
+          <a:fillRef idx="0">
+            <a:schemeClr val="accent1"/>
+          </a:fillRef>
+          <a:effectRef idx="1">
+            <a:schemeClr val="accent1"/>
+          </a:effectRef>
+          <a:fontRef idx="minor">
+            <a:schemeClr val="tx1"/>
+          </a:fontRef>
+        </p:style>
+      </p:cxnSp>
+      <p:cxnSp>
+        <p:nvCxnSpPr>
+          <p:cNvPr id="14" name="Connector 13"/>
+          <p:cNvCxnSpPr/>
+          <p:nvPr/>
+        </p:nvCxnSpPr>
+        <p:spPr>
+          <a:xfrm>
+            <a:off x="2816352" y="1650492"/>
+            <a:ext cx="201168" cy="0"/>
+          </a:xfrm>
+          <a:prstGeom prst="line">
+            <a:avLst/>
+          </a:prstGeom>
+          <a:ln w="11430">
+            <a:solidFill>
+              <a:srgbClr val="475569"/>
+            </a:solidFill>
+            <a:tailEnd type="triangle"/>
+          </a:ln>
+        </p:spPr>
+        <p:style>
+          <a:lnRef idx="2">
+            <a:schemeClr val="accent1"/>
+          </a:lnRef>
+          <a:fillRef idx="0">
+            <a:schemeClr val="accent1"/>
+          </a:fillRef>
+          <a:effectRef idx="1">
+            <a:schemeClr val="accent1"/>
+          </a:effectRef>
+          <a:fontRef idx="minor">
+            <a:schemeClr val="tx1"/>
+          </a:fontRef>
+        </p:style>
+      </p:cxnSp>
+      <p:cxnSp>
+        <p:nvCxnSpPr>
+          <p:cNvPr id="16" name="Connector 15"/>
+          <p:cNvCxnSpPr/>
+          <p:nvPr/>
+        </p:nvCxnSpPr>
+        <p:spPr>
+          <a:xfrm>
+            <a:off x="4005072" y="1650492"/>
+            <a:ext cx="201168" cy="0"/>
+          </a:xfrm>
+          <a:prstGeom prst="line">
+            <a:avLst/>
+          </a:prstGeom>
+          <a:ln w="11430">
+            <a:solidFill>
+              <a:srgbClr val="475569"/>
+            </a:solidFill>
+            <a:tailEnd type="triangle"/>
+          </a:ln>
+        </p:spPr>
+        <p:style>
+          <a:lnRef idx="2">
+            <a:schemeClr val="accent1"/>
+          </a:lnRef>
+          <a:fillRef idx="0">
+            <a:schemeClr val="accent1"/>
+          </a:fillRef>
+          <a:effectRef idx="1">
+            <a:schemeClr val="accent1"/>
+          </a:effectRef>
+          <a:fontRef idx="minor">
+            <a:schemeClr val="tx1"/>
+          </a:fontRef>
+        </p:style>
+      </p:cxnSp>
+      <p:cxnSp>
+        <p:nvCxnSpPr>
+          <p:cNvPr id="18" name="Connector 17"/>
+          <p:cNvCxnSpPr/>
+          <p:nvPr/>
+        </p:nvCxnSpPr>
+        <p:spPr>
+          <a:xfrm>
+            <a:off x="5193792" y="1650492"/>
+            <a:ext cx="201168" cy="0"/>
+          </a:xfrm>
+          <a:prstGeom prst="line">
+            <a:avLst/>
+          </a:prstGeom>
+          <a:ln w="11430">
+            <a:solidFill>
+              <a:srgbClr val="475569"/>
+            </a:solidFill>
+            <a:tailEnd type="triangle"/>
+          </a:ln>
+        </p:spPr>
+        <p:style>
+          <a:lnRef idx="2">
+            <a:schemeClr val="accent1"/>
+          </a:lnRef>
+          <a:fillRef idx="0">
+            <a:schemeClr val="accent1"/>
+          </a:fillRef>
+          <a:effectRef idx="1">
+            <a:schemeClr val="accent1"/>
+          </a:effectRef>
+          <a:fontRef idx="minor">
+            <a:schemeClr val="tx1"/>
+          </a:fontRef>
+        </p:style>
+      </p:cxnSp>
+      <p:cxnSp>
+        <p:nvCxnSpPr>
+          <p:cNvPr id="20" name="Connector 19"/>
+          <p:cNvCxnSpPr/>
+          <p:nvPr/>
+        </p:nvCxnSpPr>
+        <p:spPr>
+          <a:xfrm>
+            <a:off x="6382512" y="1650492"/>
+            <a:ext cx="201168" cy="0"/>
+          </a:xfrm>
+          <a:prstGeom prst="line">
+            <a:avLst/>
+          </a:prstGeom>
+          <a:ln w="11430">
+            <a:solidFill>
+              <a:srgbClr val="475569"/>
+            </a:solidFill>
+            <a:tailEnd type="triangle"/>
+          </a:ln>
+        </p:spPr>
+        <p:style>
+          <a:lnRef idx="2">
+            <a:schemeClr val="accent1"/>
+          </a:lnRef>
+          <a:fillRef idx="0">
+            <a:schemeClr val="accent1"/>
+          </a:fillRef>
+          <a:effectRef idx="1">
+            <a:schemeClr val="accent1"/>
+          </a:effectRef>
+          <a:fontRef idx="minor">
+            <a:schemeClr val="tx1"/>
+          </a:fontRef>
+        </p:style>
+      </p:cxnSp>
+      <p:cxnSp>
+        <p:nvCxnSpPr>
+          <p:cNvPr id="22" name="Connector 21"/>
+          <p:cNvCxnSpPr/>
+          <p:nvPr/>
+        </p:nvCxnSpPr>
+        <p:spPr>
+          <a:xfrm>
+            <a:off x="7571232" y="1650492"/>
+            <a:ext cx="201168" cy="0"/>
+          </a:xfrm>
+          <a:prstGeom prst="line">
+            <a:avLst/>
+          </a:prstGeom>
+          <a:ln w="11430">
+            <a:solidFill>
+              <a:srgbClr val="475569"/>
+            </a:solidFill>
+            <a:tailEnd type="triangle"/>
+          </a:ln>
+        </p:spPr>
+        <p:style>
+          <a:lnRef idx="2">
+            <a:schemeClr val="accent1"/>
+          </a:lnRef>
+          <a:fillRef idx="0">
+            <a:schemeClr val="accent1"/>
+          </a:fillRef>
+          <a:effectRef idx="1">
+            <a:schemeClr val="accent1"/>
+          </a:effectRef>
+          <a:fontRef idx="minor">
+            <a:schemeClr val="tx1"/>
+          </a:fontRef>
+        </p:style>
+      </p:cxnSp>
+      <p:cxnSp>
+        <p:nvCxnSpPr>
+          <p:cNvPr id="24" name="Connector 23"/>
+          <p:cNvCxnSpPr>
+            <a:cxnSpLocks/>
+            <a:endCxn id="75" idx="1"/>
+          </p:cNvCxnSpPr>
+          <p:nvPr/>
+        </p:nvCxnSpPr>
+        <p:spPr>
+          <a:xfrm>
+            <a:off x="8759952" y="1650492"/>
+            <a:ext cx="370332" cy="1778"/>
+          </a:xfrm>
+          <a:prstGeom prst="line">
+            <a:avLst/>
+          </a:prstGeom>
+          <a:ln w="11430">
+            <a:solidFill>
+              <a:srgbClr val="475569"/>
+            </a:solidFill>
+            <a:tailEnd type="triangle"/>
+          </a:ln>
+        </p:spPr>
+        <p:style>
+          <a:lnRef idx="2">
+            <a:schemeClr val="accent1"/>
+          </a:lnRef>
+          <a:fillRef idx="0">
+            <a:schemeClr val="accent1"/>
+          </a:fillRef>
+          <a:effectRef idx="1">
+            <a:schemeClr val="accent1"/>
+          </a:effectRef>
+          <a:fontRef idx="minor">
+            <a:schemeClr val="tx1"/>
+          </a:fontRef>
+        </p:style>
+      </p:cxnSp>
+      <p:cxnSp>
+        <p:nvCxnSpPr>
+          <p:cNvPr id="26" name="Connector 25"/>
+          <p:cNvCxnSpPr/>
+          <p:nvPr/>
+        </p:nvCxnSpPr>
+        <p:spPr>
+          <a:xfrm>
+            <a:off x="1133856" y="1792224"/>
+            <a:ext cx="694944" cy="498348"/>
+          </a:xfrm>
+          <a:prstGeom prst="line">
+            <a:avLst/>
+          </a:prstGeom>
+          <a:ln w="11430">
+            <a:solidFill>
+              <a:srgbClr val="475569"/>
+            </a:solidFill>
+            <a:tailEnd type="triangle"/>
+          </a:ln>
+        </p:spPr>
+        <p:style>
+          <a:lnRef idx="2">
+            <a:schemeClr val="accent1"/>
+          </a:lnRef>
+          <a:fillRef idx="0">
+            <a:schemeClr val="accent1"/>
+          </a:fillRef>
+          <a:effectRef idx="1">
+            <a:schemeClr val="accent1"/>
+          </a:effectRef>
+          <a:fontRef idx="minor">
+            <a:schemeClr val="tx1"/>
+          </a:fontRef>
+        </p:style>
+      </p:cxnSp>
+      <p:cxnSp>
+        <p:nvCxnSpPr>
+          <p:cNvPr id="28" name="Connector 27"/>
+          <p:cNvCxnSpPr/>
+          <p:nvPr/>
+        </p:nvCxnSpPr>
+        <p:spPr>
+          <a:xfrm>
+            <a:off x="2816352" y="2290572"/>
+            <a:ext cx="201168" cy="0"/>
+          </a:xfrm>
+          <a:prstGeom prst="line">
+            <a:avLst/>
+          </a:prstGeom>
+          <a:ln w="11430">
+            <a:solidFill>
+              <a:srgbClr val="475569"/>
+            </a:solidFill>
+            <a:tailEnd type="triangle"/>
+          </a:ln>
+        </p:spPr>
+        <p:style>
+          <a:lnRef idx="2">
+            <a:schemeClr val="accent1"/>
+          </a:lnRef>
+          <a:fillRef idx="0">
+            <a:schemeClr val="accent1"/>
+          </a:fillRef>
+          <a:effectRef idx="1">
+            <a:schemeClr val="accent1"/>
+          </a:effectRef>
+          <a:fontRef idx="minor">
+            <a:schemeClr val="tx1"/>
+          </a:fontRef>
+        </p:style>
+      </p:cxnSp>
+      <p:cxnSp>
+        <p:nvCxnSpPr>
+          <p:cNvPr id="34" name="Connector 33"/>
+          <p:cNvCxnSpPr>
+            <a:cxnSpLocks/>
+            <a:endCxn id="70" idx="1"/>
+          </p:cNvCxnSpPr>
+          <p:nvPr/>
+        </p:nvCxnSpPr>
+        <p:spPr>
+          <a:xfrm>
+            <a:off x="1133856" y="1792224"/>
+            <a:ext cx="694944" cy="1050544"/>
+          </a:xfrm>
+          <a:prstGeom prst="line">
+            <a:avLst/>
+          </a:prstGeom>
+          <a:ln w="11430">
+            <a:solidFill>
+              <a:srgbClr val="475569"/>
+            </a:solidFill>
+            <a:tailEnd type="triangle"/>
+          </a:ln>
+        </p:spPr>
+        <p:style>
+          <a:lnRef idx="2">
+            <a:schemeClr val="accent1"/>
+          </a:lnRef>
+          <a:fillRef idx="0">
+            <a:schemeClr val="accent1"/>
+          </a:fillRef>
+          <a:effectRef idx="1">
+            <a:schemeClr val="accent1"/>
+          </a:effectRef>
+          <a:fontRef idx="minor">
+            <a:schemeClr val="tx1"/>
+          </a:fontRef>
+        </p:style>
+      </p:cxnSp>
+      <p:cxnSp>
+        <p:nvCxnSpPr>
+          <p:cNvPr id="46" name="Connector 45"/>
+          <p:cNvCxnSpPr>
+            <a:cxnSpLocks/>
+            <a:endCxn id="73" idx="1"/>
+          </p:cNvCxnSpPr>
+          <p:nvPr/>
+        </p:nvCxnSpPr>
+        <p:spPr>
+          <a:xfrm>
+            <a:off x="3511296" y="1792224"/>
+            <a:ext cx="1115568" cy="484124"/>
+          </a:xfrm>
+          <a:prstGeom prst="line">
+            <a:avLst/>
+          </a:prstGeom>
+          <a:ln w="11430">
+            <a:solidFill>
+              <a:srgbClr val="475569"/>
+            </a:solidFill>
+            <a:tailEnd type="triangle"/>
+          </a:ln>
+        </p:spPr>
+        <p:style>
+          <a:lnRef idx="2">
+            <a:schemeClr val="accent1"/>
+          </a:lnRef>
+          <a:fillRef idx="0">
+            <a:schemeClr val="accent1"/>
+          </a:fillRef>
+          <a:effectRef idx="1">
+            <a:schemeClr val="accent1"/>
+          </a:effectRef>
+          <a:fontRef idx="minor">
+            <a:schemeClr val="tx1"/>
+          </a:fontRef>
+        </p:style>
+      </p:cxnSp>
+      <p:cxnSp>
+        <p:nvCxnSpPr>
+          <p:cNvPr id="48" name="Connector 47"/>
+          <p:cNvCxnSpPr>
+            <a:cxnSpLocks/>
+            <a:stCxn id="73" idx="3"/>
+          </p:cNvCxnSpPr>
+          <p:nvPr/>
+        </p:nvCxnSpPr>
+        <p:spPr>
+          <a:xfrm flipV="1">
+            <a:off x="5614416" y="2273808"/>
+            <a:ext cx="225044" cy="2540"/>
+          </a:xfrm>
+          <a:prstGeom prst="line">
+            <a:avLst/>
+          </a:prstGeom>
+          <a:ln w="11430">
+            <a:solidFill>
+              <a:srgbClr val="475569"/>
+            </a:solidFill>
+            <a:tailEnd type="triangle"/>
+          </a:ln>
+        </p:spPr>
+        <p:style>
+          <a:lnRef idx="2">
+            <a:schemeClr val="accent1"/>
+          </a:lnRef>
+          <a:fillRef idx="0">
+            <a:schemeClr val="accent1"/>
+          </a:fillRef>
+          <a:effectRef idx="1">
+            <a:schemeClr val="accent1"/>
+          </a:effectRef>
+          <a:fontRef idx="minor">
+            <a:schemeClr val="tx1"/>
+          </a:fontRef>
+        </p:style>
+      </p:cxnSp>
+      <p:cxnSp>
+        <p:nvCxnSpPr>
+          <p:cNvPr id="50" name="Connector 49"/>
+          <p:cNvCxnSpPr/>
+          <p:nvPr/>
+        </p:nvCxnSpPr>
+        <p:spPr>
+          <a:xfrm>
+            <a:off x="1627632" y="3482847"/>
+            <a:ext cx="201168" cy="0"/>
+          </a:xfrm>
+          <a:prstGeom prst="line">
+            <a:avLst/>
+          </a:prstGeom>
+          <a:ln w="11430">
+            <a:solidFill>
+              <a:srgbClr val="BE123C"/>
+            </a:solidFill>
+            <a:tailEnd type="triangle"/>
+          </a:ln>
+        </p:spPr>
+        <p:style>
+          <a:lnRef idx="2">
+            <a:schemeClr val="accent1"/>
+          </a:lnRef>
+          <a:fillRef idx="0">
+            <a:schemeClr val="accent1"/>
+          </a:fillRef>
+          <a:effectRef idx="1">
+            <a:schemeClr val="accent1"/>
+          </a:effectRef>
+          <a:fontRef idx="minor">
+            <a:schemeClr val="tx1"/>
+          </a:fontRef>
+        </p:style>
+      </p:cxnSp>
+      <p:cxnSp>
+        <p:nvCxnSpPr>
+          <p:cNvPr id="52" name="Connector 51"/>
+          <p:cNvCxnSpPr/>
+          <p:nvPr/>
+        </p:nvCxnSpPr>
+        <p:spPr>
+          <a:xfrm>
+            <a:off x="2816352" y="3482847"/>
+            <a:ext cx="201168" cy="0"/>
+          </a:xfrm>
+          <a:prstGeom prst="line">
+            <a:avLst/>
+          </a:prstGeom>
+          <a:ln w="11430">
+            <a:solidFill>
+              <a:srgbClr val="BE123C"/>
+            </a:solidFill>
+            <a:tailEnd type="triangle"/>
+          </a:ln>
+        </p:spPr>
+        <p:style>
+          <a:lnRef idx="2">
+            <a:schemeClr val="accent1"/>
+          </a:lnRef>
+          <a:fillRef idx="0">
+            <a:schemeClr val="accent1"/>
+          </a:fillRef>
+          <a:effectRef idx="1">
+            <a:schemeClr val="accent1"/>
+          </a:effectRef>
+          <a:fontRef idx="minor">
+            <a:schemeClr val="tx1"/>
+          </a:fontRef>
+        </p:style>
+      </p:cxnSp>
+      <p:cxnSp>
+        <p:nvCxnSpPr>
+          <p:cNvPr id="59" name="Connector 58"/>
+          <p:cNvCxnSpPr/>
+          <p:nvPr/>
+        </p:nvCxnSpPr>
+        <p:spPr>
+          <a:xfrm>
+            <a:off x="4892040" y="1650492"/>
+            <a:ext cx="502920" cy="0"/>
+          </a:xfrm>
+          <a:prstGeom prst="line">
+            <a:avLst/>
+          </a:prstGeom>
+          <a:ln w="11430">
+            <a:solidFill>
+              <a:srgbClr val="2563EB"/>
+            </a:solidFill>
+            <a:prstDash val="dash"/>
+            <a:tailEnd type="triangle"/>
+          </a:ln>
+        </p:spPr>
+        <p:style>
+          <a:lnRef idx="2">
+            <a:schemeClr val="accent1"/>
+          </a:lnRef>
+          <a:fillRef idx="0">
+            <a:schemeClr val="accent1"/>
+          </a:fillRef>
+          <a:effectRef idx="1">
+            <a:schemeClr val="accent1"/>
+          </a:effectRef>
+          <a:fontRef idx="minor">
+            <a:schemeClr val="tx1"/>
+          </a:fontRef>
+        </p:style>
+      </p:cxnSp>
+      <p:sp>
+        <p:nvSpPr>
+          <p:cNvPr id="60" name="Rounded Rectangle 59"/>
+          <p:cNvSpPr/>
+          <p:nvPr/>
+        </p:nvSpPr>
+        <p:spPr>
+          <a:xfrm>
+            <a:off x="640080" y="1508760"/>
+            <a:ext cx="987552" cy="283464"/>
           </a:xfrm>
           <a:prstGeom prst="roundRect">
             <a:avLst/>
           </a:prstGeom>
           <a:solidFill>
-            <a:srgbClr val="F8FAFC"/>
+            <a:srgbClr val="ECFDF5"/>
           </a:solidFill>
-          <a:ln w="10160">
+          <a:ln w="12700">
             <a:solidFill>
-              <a:srgbClr val="CBD5E1"/>
+              <a:srgbClr val="10B981"/>
             </a:solidFill>
           </a:ln>
         </p:spPr>
@@ -29106,67 +29749,39 @@
           </a:fontRef>
         </p:style>
         <p:txBody>
-          <a:bodyPr rtlCol="0" anchor="ctr"/>
+          <a:bodyPr lIns="27432" tIns="18288" rIns="27432" bIns="18288" rtlCol="0" anchor="ctr"/>
           <a:lstStyle/>
           <a:p>
             <a:pPr algn="ctr"/>
-            <a:endParaRPr/>
-          </a:p>
-        </p:txBody>
-      </p:sp>
-      <p:sp>
-        <p:nvSpPr>
-          <p:cNvPr id="263" name="TextBox 262"/>
-          <p:cNvSpPr txBox="1"/>
-          <p:nvPr/>
-        </p:nvSpPr>
-        <p:spPr>
-          <a:xfrm>
-            <a:off x="8567928" y="1389888"/>
-            <a:ext cx="2843784" cy="182880"/>
-          </a:xfrm>
-          <a:prstGeom prst="rect">
-            <a:avLst/>
-          </a:prstGeom>
-          <a:noFill/>
-        </p:spPr>
-        <p:txBody>
-          <a:bodyPr wrap="none" lIns="36576" tIns="18288" rIns="36576" bIns="18288">
-            <a:spAutoFit/>
-          </a:bodyPr>
-          <a:lstStyle/>
-          <a:p>
-            <a:pPr algn="l"/>
-            <a:r>
-              <a:rPr sz="850" b="1">
-                <a:solidFill>
-                  <a:srgbClr val="2563EB"/>
-                </a:solidFill>
-                <a:latin typeface="Calibri"/>
-              </a:rPr>
-              <a:t>Identity</a:t>
-            </a:r>
-          </a:p>
-        </p:txBody>
-      </p:sp>
-      <p:sp>
-        <p:nvSpPr>
-          <p:cNvPr id="264" name="Rounded Rectangle 263"/>
-          <p:cNvSpPr/>
-          <p:nvPr/>
-        </p:nvSpPr>
-        <p:spPr>
-          <a:xfrm>
-            <a:off x="548640" y="3520440"/>
-            <a:ext cx="2788920" cy="1051560"/>
+            <a:r>
+              <a:rPr sz="680" b="1">
+                <a:solidFill>
+                  <a:srgbClr val="111827"/>
+                </a:solidFill>
+              </a:rPr>
+              <a:t>Units</a:t>
+            </a:r>
+          </a:p>
+        </p:txBody>
+      </p:sp>
+      <p:sp>
+        <p:nvSpPr>
+          <p:cNvPr id="61" name="Rounded Rectangle 60"/>
+          <p:cNvSpPr/>
+          <p:nvPr/>
+        </p:nvSpPr>
+        <p:spPr>
+          <a:xfrm>
+            <a:off x="1828800" y="1508760"/>
+            <a:ext cx="987552" cy="283464"/>
           </a:xfrm>
           <a:prstGeom prst="roundRect">
             <a:avLst/>
           </a:prstGeom>
           <a:solidFill>
-            <a:srgbClr val="F8FAFC"/>
+            <a:srgbClr val="FFFFFF"/>
           </a:solidFill>
-          <a:ln w="10160">
+          <a:ln w="12700">
             <a:solidFill>
               <a:srgbClr val="CBD5E1"/>
             </a:solidFill>
@@ -29187,69 +29802,41 @@
           </a:fontRef>
         </p:style>
         <p:txBody>
-          <a:bodyPr rtlCol="0" anchor="ctr"/>
+          <a:bodyPr lIns="27432" tIns="18288" rIns="27432" bIns="18288" rtlCol="0" anchor="ctr"/>
           <a:lstStyle/>
           <a:p>
             <a:pPr algn="ctr"/>
-            <a:endParaRPr/>
-          </a:p>
-        </p:txBody>
-      </p:sp>
-      <p:sp>
-        <p:nvSpPr>
-          <p:cNvPr id="265" name="TextBox 264"/>
-          <p:cNvSpPr txBox="1"/>
-          <p:nvPr/>
-        </p:nvSpPr>
-        <p:spPr>
-          <a:xfrm>
-            <a:off x="658368" y="3584448"/>
-            <a:ext cx="2569463" cy="182880"/>
-          </a:xfrm>
-          <a:prstGeom prst="rect">
-            <a:avLst/>
-          </a:prstGeom>
-          <a:noFill/>
-        </p:spPr>
-        <p:txBody>
-          <a:bodyPr wrap="none" lIns="36576" tIns="18288" rIns="36576" bIns="18288">
-            <a:spAutoFit/>
-          </a:bodyPr>
-          <a:lstStyle/>
-          <a:p>
-            <a:pPr algn="l"/>
-            <a:r>
-              <a:rPr sz="850" b="1">
-                <a:solidFill>
-                  <a:srgbClr val="475569"/>
-                </a:solidFill>
-                <a:latin typeface="Calibri"/>
-              </a:rPr>
-              <a:t>EF Core / SQLite</a:t>
-            </a:r>
-          </a:p>
-        </p:txBody>
-      </p:sp>
-      <p:sp>
-        <p:nvSpPr>
-          <p:cNvPr id="266" name="Rounded Rectangle 265"/>
-          <p:cNvSpPr/>
-          <p:nvPr/>
-        </p:nvSpPr>
-        <p:spPr>
-          <a:xfrm>
-            <a:off x="3520440" y="3520440"/>
-            <a:ext cx="8001000" cy="2670048"/>
+            <a:r>
+              <a:rPr sz="590" b="1">
+                <a:solidFill>
+                  <a:srgbClr val="111827"/>
+                </a:solidFill>
+              </a:rPr>
+              <a:t>UnitModels</a:t>
+            </a:r>
+          </a:p>
+        </p:txBody>
+      </p:sp>
+      <p:sp>
+        <p:nvSpPr>
+          <p:cNvPr id="62" name="Rounded Rectangle 61"/>
+          <p:cNvSpPr/>
+          <p:nvPr/>
+        </p:nvSpPr>
+        <p:spPr>
+          <a:xfrm>
+            <a:off x="3017520" y="1508760"/>
+            <a:ext cx="987552" cy="283464"/>
           </a:xfrm>
           <a:prstGeom prst="roundRect">
             <a:avLst/>
           </a:prstGeom>
           <a:solidFill>
-            <a:srgbClr val="F8FAFC"/>
+            <a:srgbClr val="ECFDF5"/>
           </a:solidFill>
-          <a:ln w="10160">
+          <a:ln w="12700">
             <a:solidFill>
-              <a:srgbClr val="CBD5E1"/>
+              <a:srgbClr val="10B981"/>
             </a:solidFill>
           </a:ln>
         </p:spPr>
@@ -29268,91 +29855,39 @@
           </a:fontRef>
         </p:style>
         <p:txBody>
-          <a:bodyPr rtlCol="0" anchor="ctr"/>
+          <a:bodyPr lIns="27432" tIns="18288" rIns="27432" bIns="18288" rtlCol="0" anchor="ctr"/>
           <a:lstStyle/>
           <a:p>
             <a:pPr algn="ctr"/>
-            <a:endParaRPr/>
-          </a:p>
-        </p:txBody>
-      </p:sp>
-      <p:sp>
-        <p:nvSpPr>
-          <p:cNvPr id="267" name="TextBox 266"/>
-          <p:cNvSpPr txBox="1"/>
-          <p:nvPr/>
-        </p:nvSpPr>
-        <p:spPr>
-          <a:xfrm>
-            <a:off x="3703320" y="3584448"/>
-            <a:ext cx="7708392" cy="167738"/>
-          </a:xfrm>
-          <a:prstGeom prst="rect">
-            <a:avLst/>
-          </a:prstGeom>
-          <a:noFill/>
-        </p:spPr>
-        <p:txBody>
-          <a:bodyPr wrap="square" lIns="36576" tIns="18288" rIns="36576" bIns="18288">
-            <a:spAutoFit/>
-          </a:bodyPr>
-          <a:lstStyle/>
-          <a:p>
-            <a:pPr algn="l"/>
-            <a:r>
-              <a:rPr sz="850" b="1" dirty="0" err="1">
+            <a:r>
+              <a:rPr sz="680" b="1">
                 <a:solidFill>
                   <a:srgbClr val="111827"/>
                 </a:solidFill>
-                <a:latin typeface="Calibri"/>
-              </a:rPr>
-              <a:t>Основные</a:t>
-            </a:r>
-            <a:r>
-              <a:rPr sz="850" b="1" dirty="0">
-                <a:solidFill>
-                  <a:srgbClr val="111827"/>
-                </a:solidFill>
-                <a:latin typeface="Calibri"/>
-              </a:rPr>
-              <a:t> </a:t>
-            </a:r>
-            <a:r>
-              <a:rPr sz="850" b="1" dirty="0" err="1">
-                <a:solidFill>
-                  <a:srgbClr val="111827"/>
-                </a:solidFill>
-                <a:latin typeface="Calibri"/>
-              </a:rPr>
-              <a:t>связи</a:t>
-            </a:r>
-            <a:endParaRPr sz="850" b="1" dirty="0">
-              <a:solidFill>
-                <a:srgbClr val="111827"/>
-              </a:solidFill>
-              <a:latin typeface="Calibri"/>
-            </a:endParaRPr>
-          </a:p>
-        </p:txBody>
-      </p:sp>
-      <p:sp>
-        <p:nvSpPr>
-          <p:cNvPr id="268" name="Rounded Rectangle 267"/>
-          <p:cNvSpPr/>
-          <p:nvPr/>
-        </p:nvSpPr>
-        <p:spPr>
-          <a:xfrm>
-            <a:off x="713232" y="1664208"/>
-            <a:ext cx="1216152" cy="274320"/>
+              </a:rPr>
+              <a:t>Models</a:t>
+            </a:r>
+          </a:p>
+        </p:txBody>
+      </p:sp>
+      <p:sp>
+        <p:nvSpPr>
+          <p:cNvPr id="63" name="Rounded Rectangle 62"/>
+          <p:cNvSpPr/>
+          <p:nvPr/>
+        </p:nvSpPr>
+        <p:spPr>
+          <a:xfrm>
+            <a:off x="4206240" y="1508760"/>
+            <a:ext cx="987552" cy="283464"/>
           </a:xfrm>
           <a:prstGeom prst="roundRect">
             <a:avLst/>
           </a:prstGeom>
           <a:solidFill>
-            <a:srgbClr val="ECFDF5"/>
+            <a:srgbClr val="FFFFFF"/>
           </a:solidFill>
-          <a:ln w="9525">
+          <a:ln w="12700">
             <a:solidFill>
               <a:srgbClr val="CBD5E1"/>
             </a:solidFill>
@@ -29373,32 +29908,31 @@
           </a:fontRef>
         </p:style>
         <p:txBody>
-          <a:bodyPr lIns="36576" tIns="18288" rIns="36576" bIns="18288" rtlCol="0" anchor="ctr"/>
+          <a:bodyPr lIns="27432" tIns="18288" rIns="27432" bIns="18288" rtlCol="0" anchor="ctr"/>
           <a:lstStyle/>
           <a:p>
             <a:pPr algn="ctr"/>
             <a:r>
-              <a:rPr sz="680" b="1">
-                <a:solidFill>
-                  <a:srgbClr val="0F172A"/>
-                </a:solidFill>
-                <a:latin typeface="Calibri"/>
-              </a:rPr>
-              <a:t>Units</a:t>
-            </a:r>
-          </a:p>
-        </p:txBody>
-      </p:sp>
-      <p:sp>
-        <p:nvSpPr>
-          <p:cNvPr id="269" name="Rounded Rectangle 268"/>
-          <p:cNvSpPr/>
-          <p:nvPr/>
-        </p:nvSpPr>
-        <p:spPr>
-          <a:xfrm>
-            <a:off x="2039112" y="1664208"/>
-            <a:ext cx="1216152" cy="274320"/>
+              <a:rPr sz="590" b="1">
+                <a:solidFill>
+                  <a:srgbClr val="111827"/>
+                </a:solidFill>
+              </a:rPr>
+              <a:t>ModelWeapons</a:t>
+            </a:r>
+          </a:p>
+        </p:txBody>
+      </p:sp>
+      <p:sp>
+        <p:nvSpPr>
+          <p:cNvPr id="66" name="Rounded Rectangle 65"/>
+          <p:cNvSpPr/>
+          <p:nvPr/>
+        </p:nvSpPr>
+        <p:spPr>
+          <a:xfrm>
+            <a:off x="7772400" y="1508760"/>
+            <a:ext cx="987552" cy="283464"/>
           </a:xfrm>
           <a:prstGeom prst="roundRect">
             <a:avLst/>
@@ -29406,7 +29940,7 @@
           <a:solidFill>
             <a:srgbClr val="FFFFFF"/>
           </a:solidFill>
-          <a:ln w="9525">
+          <a:ln w="12700">
             <a:solidFill>
               <a:srgbClr val="CBD5E1"/>
             </a:solidFill>
@@ -29427,40 +29961,39 @@
           </a:fontRef>
         </p:style>
         <p:txBody>
-          <a:bodyPr lIns="36576" tIns="18288" rIns="36576" bIns="18288" rtlCol="0" anchor="ctr"/>
+          <a:bodyPr lIns="27432" tIns="18288" rIns="27432" bIns="18288" rtlCol="0" anchor="ctr"/>
           <a:lstStyle/>
           <a:p>
             <a:pPr algn="ctr"/>
             <a:r>
-              <a:rPr sz="680" b="0">
-                <a:solidFill>
-                  <a:srgbClr val="0F172A"/>
-                </a:solidFill>
-                <a:latin typeface="Calibri"/>
-              </a:rPr>
-              <a:t>UnitModels</a:t>
-            </a:r>
-          </a:p>
-        </p:txBody>
-      </p:sp>
-      <p:sp>
-        <p:nvSpPr>
-          <p:cNvPr id="270" name="Rounded Rectangle 269"/>
-          <p:cNvSpPr/>
-          <p:nvPr/>
-        </p:nvSpPr>
-        <p:spPr>
-          <a:xfrm>
-            <a:off x="3364991" y="1664208"/>
-            <a:ext cx="1216152" cy="274320"/>
+              <a:rPr sz="590" b="1">
+                <a:solidFill>
+                  <a:srgbClr val="111827"/>
+                </a:solidFill>
+              </a:rPr>
+              <a:t>WeaponProfileAbilities</a:t>
+            </a:r>
+          </a:p>
+        </p:txBody>
+      </p:sp>
+      <p:sp>
+        <p:nvSpPr>
+          <p:cNvPr id="67" name="Rounded Rectangle 66"/>
+          <p:cNvSpPr/>
+          <p:nvPr/>
+        </p:nvSpPr>
+        <p:spPr>
+          <a:xfrm>
+            <a:off x="1828800" y="2148840"/>
+            <a:ext cx="987552" cy="283464"/>
           </a:xfrm>
           <a:prstGeom prst="roundRect">
             <a:avLst/>
           </a:prstGeom>
           <a:solidFill>
-            <a:srgbClr val="ECFDF5"/>
+            <a:srgbClr val="FFFFFF"/>
           </a:solidFill>
-          <a:ln w="9525">
+          <a:ln w="12700">
             <a:solidFill>
               <a:srgbClr val="CBD5E1"/>
             </a:solidFill>
@@ -29481,42 +30014,41 @@
           </a:fontRef>
         </p:style>
         <p:txBody>
-          <a:bodyPr lIns="36576" tIns="18288" rIns="36576" bIns="18288" rtlCol="0" anchor="ctr"/>
+          <a:bodyPr lIns="27432" tIns="18288" rIns="27432" bIns="18288" rtlCol="0" anchor="ctr"/>
           <a:lstStyle/>
           <a:p>
             <a:pPr algn="ctr"/>
             <a:r>
-              <a:rPr sz="680" b="1">
-                <a:solidFill>
-                  <a:srgbClr val="0F172A"/>
-                </a:solidFill>
-                <a:latin typeface="Calibri"/>
-              </a:rPr>
-              <a:t>Models</a:t>
-            </a:r>
-          </a:p>
-        </p:txBody>
-      </p:sp>
-      <p:sp>
-        <p:nvSpPr>
-          <p:cNvPr id="271" name="Rounded Rectangle 270"/>
-          <p:cNvSpPr/>
-          <p:nvPr/>
-        </p:nvSpPr>
-        <p:spPr>
-          <a:xfrm>
-            <a:off x="4690872" y="1664208"/>
-            <a:ext cx="1216152" cy="274320"/>
+              <a:rPr sz="590" b="1">
+                <a:solidFill>
+                  <a:srgbClr val="111827"/>
+                </a:solidFill>
+              </a:rPr>
+              <a:t>UnitKeywords</a:t>
+            </a:r>
+          </a:p>
+        </p:txBody>
+      </p:sp>
+      <p:sp>
+        <p:nvSpPr>
+          <p:cNvPr id="68" name="Rounded Rectangle 67"/>
+          <p:cNvSpPr/>
+          <p:nvPr/>
+        </p:nvSpPr>
+        <p:spPr>
+          <a:xfrm>
+            <a:off x="3008376" y="2148840"/>
+            <a:ext cx="987552" cy="283464"/>
           </a:xfrm>
           <a:prstGeom prst="roundRect">
             <a:avLst/>
           </a:prstGeom>
           <a:solidFill>
-            <a:srgbClr val="FFFFFF"/>
+            <a:srgbClr val="EFF6FF"/>
           </a:solidFill>
-          <a:ln w="9525">
+          <a:ln w="12700">
             <a:solidFill>
-              <a:srgbClr val="CBD5E1"/>
+              <a:srgbClr val="3B82F6"/>
             </a:solidFill>
           </a:ln>
         </p:spPr>
@@ -29535,32 +30067,31 @@
           </a:fontRef>
         </p:style>
         <p:txBody>
-          <a:bodyPr lIns="36576" tIns="18288" rIns="36576" bIns="18288" rtlCol="0" anchor="ctr"/>
+          <a:bodyPr lIns="27432" tIns="18288" rIns="27432" bIns="18288" rtlCol="0" anchor="ctr"/>
           <a:lstStyle/>
           <a:p>
             <a:pPr algn="ctr"/>
             <a:r>
-              <a:rPr sz="680" b="0">
-                <a:solidFill>
-                  <a:srgbClr val="0F172A"/>
-                </a:solidFill>
-                <a:latin typeface="Calibri"/>
-              </a:rPr>
-              <a:t>ModelWeapons</a:t>
-            </a:r>
-          </a:p>
-        </p:txBody>
-      </p:sp>
-      <p:sp>
-        <p:nvSpPr>
-          <p:cNvPr id="274" name="Rounded Rectangle 273"/>
-          <p:cNvSpPr/>
-          <p:nvPr/>
-        </p:nvSpPr>
-        <p:spPr>
-          <a:xfrm>
-            <a:off x="3364991" y="2029968"/>
-            <a:ext cx="1216152" cy="274320"/>
+              <a:rPr sz="680" b="1">
+                <a:solidFill>
+                  <a:srgbClr val="111827"/>
+                </a:solidFill>
+              </a:rPr>
+              <a:t>Keywords</a:t>
+            </a:r>
+          </a:p>
+        </p:txBody>
+      </p:sp>
+      <p:sp>
+        <p:nvSpPr>
+          <p:cNvPr id="70" name="Rounded Rectangle 69"/>
+          <p:cNvSpPr/>
+          <p:nvPr/>
+        </p:nvSpPr>
+        <p:spPr>
+          <a:xfrm>
+            <a:off x="1828800" y="2701036"/>
+            <a:ext cx="987552" cy="283464"/>
           </a:xfrm>
           <a:prstGeom prst="roundRect">
             <a:avLst/>
@@ -29568,7 +30099,7 @@
           <a:solidFill>
             <a:srgbClr val="FFFFFF"/>
           </a:solidFill>
-          <a:ln w="9525">
+          <a:ln w="12700">
             <a:solidFill>
               <a:srgbClr val="CBD5E1"/>
             </a:solidFill>
@@ -29589,40 +30120,39 @@
           </a:fontRef>
         </p:style>
         <p:txBody>
-          <a:bodyPr lIns="36576" tIns="18288" rIns="36576" bIns="18288" rtlCol="0" anchor="ctr"/>
+          <a:bodyPr lIns="27432" tIns="18288" rIns="27432" bIns="18288" rtlCol="0" anchor="ctr"/>
           <a:lstStyle/>
           <a:p>
             <a:pPr algn="ctr"/>
             <a:r>
-              <a:rPr sz="580" b="0">
-                <a:solidFill>
-                  <a:srgbClr val="0F172A"/>
-                </a:solidFill>
-                <a:latin typeface="Calibri"/>
-              </a:rPr>
-              <a:t>WeaponProfileAbilities</a:t>
-            </a:r>
-          </a:p>
-        </p:txBody>
-      </p:sp>
-      <p:sp>
-        <p:nvSpPr>
-          <p:cNvPr id="275" name="Rounded Rectangle 274"/>
-          <p:cNvSpPr/>
-          <p:nvPr/>
-        </p:nvSpPr>
-        <p:spPr>
-          <a:xfrm>
-            <a:off x="4690872" y="2029968"/>
-            <a:ext cx="1216152" cy="274320"/>
+              <a:rPr sz="590" b="1">
+                <a:solidFill>
+                  <a:srgbClr val="111827"/>
+                </a:solidFill>
+              </a:rPr>
+              <a:t>UnitOptions</a:t>
+            </a:r>
+          </a:p>
+        </p:txBody>
+      </p:sp>
+      <p:sp>
+        <p:nvSpPr>
+          <p:cNvPr id="73" name="Rounded Rectangle 72"/>
+          <p:cNvSpPr/>
+          <p:nvPr/>
+        </p:nvSpPr>
+        <p:spPr>
+          <a:xfrm>
+            <a:off x="4626864" y="2134616"/>
+            <a:ext cx="987552" cy="283464"/>
           </a:xfrm>
           <a:prstGeom prst="roundRect">
             <a:avLst/>
           </a:prstGeom>
           <a:solidFill>
-            <a:srgbClr val="F1F5F9"/>
+            <a:srgbClr val="FFFFFF"/>
           </a:solidFill>
-          <a:ln w="9525">
+          <a:ln w="12700">
             <a:solidFill>
               <a:srgbClr val="CBD5E1"/>
             </a:solidFill>
@@ -29643,42 +30173,46 @@
           </a:fontRef>
         </p:style>
         <p:txBody>
-          <a:bodyPr lIns="36576" tIns="18288" rIns="36576" bIns="18288" rtlCol="0" anchor="ctr"/>
+          <a:bodyPr lIns="27432" tIns="18288" rIns="27432" bIns="18288" rtlCol="0" anchor="ctr"/>
           <a:lstStyle/>
           <a:p>
             <a:pPr algn="ctr"/>
             <a:r>
-              <a:rPr sz="680" b="1">
-                <a:solidFill>
-                  <a:srgbClr val="0F172A"/>
-                </a:solidFill>
-                <a:latin typeface="Calibri"/>
-              </a:rPr>
-              <a:t>Abilities</a:t>
-            </a:r>
-          </a:p>
-        </p:txBody>
-      </p:sp>
-      <p:sp>
-        <p:nvSpPr>
-          <p:cNvPr id="276" name="Rounded Rectangle 275"/>
-          <p:cNvSpPr/>
-          <p:nvPr/>
-        </p:nvSpPr>
-        <p:spPr>
-          <a:xfrm>
-            <a:off x="713232" y="2395728"/>
-            <a:ext cx="1216152" cy="274320"/>
+              <a:rPr sz="590" b="1" dirty="0" err="1">
+                <a:solidFill>
+                  <a:srgbClr val="111827"/>
+                </a:solidFill>
+              </a:rPr>
+              <a:t>ModelWargears</a:t>
+            </a:r>
+            <a:endParaRPr sz="590" b="1" dirty="0">
+              <a:solidFill>
+                <a:srgbClr val="111827"/>
+              </a:solidFill>
+            </a:endParaRPr>
+          </a:p>
+        </p:txBody>
+      </p:sp>
+      <p:sp>
+        <p:nvSpPr>
+          <p:cNvPr id="75" name="Rounded Rectangle 74"/>
+          <p:cNvSpPr/>
+          <p:nvPr/>
+        </p:nvSpPr>
+        <p:spPr>
+          <a:xfrm>
+            <a:off x="9130284" y="1510538"/>
+            <a:ext cx="987552" cy="283464"/>
           </a:xfrm>
           <a:prstGeom prst="roundRect">
             <a:avLst/>
           </a:prstGeom>
           <a:solidFill>
-            <a:srgbClr val="FFFFFF"/>
+            <a:srgbClr val="EFF6FF"/>
           </a:solidFill>
-          <a:ln w="9525">
+          <a:ln w="12700">
             <a:solidFill>
-              <a:srgbClr val="CBD5E1"/>
+              <a:srgbClr val="3B82F6"/>
             </a:solidFill>
           </a:ln>
         </p:spPr>
@@ -29697,42 +30231,41 @@
           </a:fontRef>
         </p:style>
         <p:txBody>
-          <a:bodyPr lIns="36576" tIns="18288" rIns="36576" bIns="18288" rtlCol="0" anchor="ctr"/>
+          <a:bodyPr lIns="27432" tIns="18288" rIns="27432" bIns="18288" rtlCol="0" anchor="ctr"/>
           <a:lstStyle/>
           <a:p>
             <a:pPr algn="ctr"/>
             <a:r>
-              <a:rPr sz="680" b="0">
-                <a:solidFill>
-                  <a:srgbClr val="0F172A"/>
-                </a:solidFill>
-                <a:latin typeface="Calibri"/>
-              </a:rPr>
-              <a:t>UnitKeywords</a:t>
-            </a:r>
-          </a:p>
-        </p:txBody>
-      </p:sp>
-      <p:sp>
-        <p:nvSpPr>
-          <p:cNvPr id="277" name="Rounded Rectangle 276"/>
-          <p:cNvSpPr/>
-          <p:nvPr/>
-        </p:nvSpPr>
-        <p:spPr>
-          <a:xfrm>
-            <a:off x="2039112" y="2395728"/>
-            <a:ext cx="1216152" cy="274320"/>
+              <a:rPr sz="680" b="1" dirty="0">
+                <a:solidFill>
+                  <a:srgbClr val="111827"/>
+                </a:solidFill>
+              </a:rPr>
+              <a:t>Abilities</a:t>
+            </a:r>
+          </a:p>
+        </p:txBody>
+      </p:sp>
+      <p:sp>
+        <p:nvSpPr>
+          <p:cNvPr id="76" name="Rounded Rectangle 75"/>
+          <p:cNvSpPr/>
+          <p:nvPr/>
+        </p:nvSpPr>
+        <p:spPr>
+          <a:xfrm>
+            <a:off x="640080" y="3341115"/>
+            <a:ext cx="987552" cy="283464"/>
           </a:xfrm>
           <a:prstGeom prst="roundRect">
             <a:avLst/>
           </a:prstGeom>
           <a:solidFill>
-            <a:srgbClr val="F1F5F9"/>
+            <a:srgbClr val="FEF2F2"/>
           </a:solidFill>
-          <a:ln w="9525">
+          <a:ln w="12700">
             <a:solidFill>
-              <a:srgbClr val="CBD5E1"/>
+              <a:srgbClr val="EF4444"/>
             </a:solidFill>
           </a:ln>
         </p:spPr>
@@ -29751,42 +30284,46 @@
           </a:fontRef>
         </p:style>
         <p:txBody>
-          <a:bodyPr lIns="36576" tIns="18288" rIns="36576" bIns="18288" rtlCol="0" anchor="ctr"/>
+          <a:bodyPr lIns="27432" tIns="18288" rIns="27432" bIns="18288" rtlCol="0" anchor="ctr"/>
           <a:lstStyle/>
           <a:p>
             <a:pPr algn="ctr"/>
             <a:r>
-              <a:rPr sz="680" b="1" dirty="0">
-                <a:solidFill>
-                  <a:srgbClr val="0F172A"/>
-                </a:solidFill>
-                <a:latin typeface="Calibri"/>
-              </a:rPr>
-              <a:t>Keywords</a:t>
-            </a:r>
-          </a:p>
-        </p:txBody>
-      </p:sp>
-      <p:sp>
-        <p:nvSpPr>
-          <p:cNvPr id="278" name="Rounded Rectangle 277"/>
-          <p:cNvSpPr/>
-          <p:nvPr/>
-        </p:nvSpPr>
-        <p:spPr>
-          <a:xfrm>
-            <a:off x="3364991" y="2395728"/>
-            <a:ext cx="1216152" cy="274320"/>
+              <a:rPr sz="640" b="1" dirty="0" err="1">
+                <a:solidFill>
+                  <a:srgbClr val="111827"/>
+                </a:solidFill>
+              </a:rPr>
+              <a:t>SimulationResults</a:t>
+            </a:r>
+            <a:endParaRPr sz="640" b="1" dirty="0">
+              <a:solidFill>
+                <a:srgbClr val="111827"/>
+              </a:solidFill>
+            </a:endParaRPr>
+          </a:p>
+        </p:txBody>
+      </p:sp>
+      <p:sp>
+        <p:nvSpPr>
+          <p:cNvPr id="77" name="Rounded Rectangle 76"/>
+          <p:cNvSpPr/>
+          <p:nvPr/>
+        </p:nvSpPr>
+        <p:spPr>
+          <a:xfrm>
+            <a:off x="1828800" y="3341115"/>
+            <a:ext cx="987552" cy="283464"/>
           </a:xfrm>
           <a:prstGeom prst="roundRect">
             <a:avLst/>
           </a:prstGeom>
           <a:solidFill>
-            <a:srgbClr val="FFFFFF"/>
+            <a:srgbClr val="FEF2F2"/>
           </a:solidFill>
-          <a:ln w="9525">
+          <a:ln w="12700">
             <a:solidFill>
-              <a:srgbClr val="CBD5E1"/>
+              <a:srgbClr val="EF4444"/>
             </a:solidFill>
           </a:ln>
         </p:spPr>
@@ -29805,42 +30342,41 @@
           </a:fontRef>
         </p:style>
         <p:txBody>
-          <a:bodyPr lIns="36576" tIns="18288" rIns="36576" bIns="18288" rtlCol="0" anchor="ctr"/>
+          <a:bodyPr lIns="27432" tIns="18288" rIns="27432" bIns="18288" rtlCol="0" anchor="ctr"/>
           <a:lstStyle/>
           <a:p>
             <a:pPr algn="ctr"/>
             <a:r>
-              <a:rPr sz="680" b="0">
-                <a:solidFill>
-                  <a:srgbClr val="0F172A"/>
-                </a:solidFill>
-                <a:latin typeface="Calibri"/>
-              </a:rPr>
-              <a:t>UnitAbilities</a:t>
-            </a:r>
-          </a:p>
-        </p:txBody>
-      </p:sp>
-      <p:sp>
-        <p:nvSpPr>
-          <p:cNvPr id="279" name="Rounded Rectangle 278"/>
-          <p:cNvSpPr/>
-          <p:nvPr/>
-        </p:nvSpPr>
-        <p:spPr>
-          <a:xfrm>
-            <a:off x="4690872" y="2395728"/>
-            <a:ext cx="1216152" cy="274320"/>
+              <a:rPr sz="640" b="1">
+                <a:solidFill>
+                  <a:srgbClr val="111827"/>
+                </a:solidFill>
+              </a:rPr>
+              <a:t>TurnStats</a:t>
+            </a:r>
+          </a:p>
+        </p:txBody>
+      </p:sp>
+      <p:sp>
+        <p:nvSpPr>
+          <p:cNvPr id="78" name="Rounded Rectangle 77"/>
+          <p:cNvSpPr/>
+          <p:nvPr/>
+        </p:nvSpPr>
+        <p:spPr>
+          <a:xfrm>
+            <a:off x="3017520" y="3341115"/>
+            <a:ext cx="987552" cy="283464"/>
           </a:xfrm>
           <a:prstGeom prst="roundRect">
             <a:avLst/>
           </a:prstGeom>
           <a:solidFill>
-            <a:srgbClr val="FFFFFF"/>
+            <a:srgbClr val="FEF2F2"/>
           </a:solidFill>
-          <a:ln w="9525">
+          <a:ln w="12700">
             <a:solidFill>
-              <a:srgbClr val="CBD5E1"/>
+              <a:srgbClr val="EF4444"/>
             </a:solidFill>
           </a:ln>
         </p:spPr>
@@ -29859,42 +30395,47 @@
           </a:fontRef>
         </p:style>
         <p:txBody>
-          <a:bodyPr lIns="36576" tIns="18288" rIns="36576" bIns="18288" rtlCol="0" anchor="ctr"/>
+          <a:bodyPr lIns="27432" tIns="18288" rIns="27432" bIns="18288" rtlCol="0" anchor="ctr"/>
           <a:lstStyle/>
           <a:p>
             <a:pPr algn="ctr"/>
             <a:r>
-              <a:rPr sz="680" b="0">
-                <a:solidFill>
-                  <a:srgbClr val="0F172A"/>
-                </a:solidFill>
-                <a:latin typeface="Calibri"/>
-              </a:rPr>
-              <a:t>UnitOptions</a:t>
-            </a:r>
-          </a:p>
-        </p:txBody>
-      </p:sp>
-      <p:sp>
-        <p:nvSpPr>
-          <p:cNvPr id="280" name="Rounded Rectangle 279"/>
-          <p:cNvSpPr/>
-          <p:nvPr/>
-        </p:nvSpPr>
-        <p:spPr>
-          <a:xfrm>
-            <a:off x="713232" y="2761488"/>
-            <a:ext cx="1216152" cy="274320"/>
+              <a:rPr sz="640" b="1">
+                <a:solidFill>
+                  <a:srgbClr val="111827"/>
+                </a:solidFill>
+              </a:rPr>
+              <a:t>WeaponStats</a:t>
+            </a:r>
+          </a:p>
+        </p:txBody>
+      </p:sp>
+      <p:sp>
+        <p:nvSpPr>
+          <p:cNvPr id="92" name="Rounded Rectangle 67">
+            <a:extLst>
+              <a:ext uri="{FF2B5EF4-FFF2-40B4-BE49-F238E27FC236}">
+                <a16:creationId xmlns:a16="http://schemas.microsoft.com/office/drawing/2014/main" id="{668BB858-6E86-4224-AF03-1D139DF3B06F}"/>
+              </a:ext>
+            </a:extLst>
+          </p:cNvPr>
+          <p:cNvSpPr/>
+          <p:nvPr/>
+        </p:nvSpPr>
+        <p:spPr>
+          <a:xfrm>
+            <a:off x="5815584" y="2132076"/>
+            <a:ext cx="987552" cy="283464"/>
           </a:xfrm>
           <a:prstGeom prst="roundRect">
             <a:avLst/>
           </a:prstGeom>
           <a:solidFill>
-            <a:srgbClr val="FFFFFF"/>
+            <a:srgbClr val="EFF6FF"/>
           </a:solidFill>
-          <a:ln w="9525">
+          <a:ln w="12700">
             <a:solidFill>
-              <a:srgbClr val="CBD5E1"/>
+              <a:srgbClr val="3B82F6"/>
             </a:solidFill>
           </a:ln>
         </p:spPr>
@@ -29913,42 +30454,52 @@
           </a:fontRef>
         </p:style>
         <p:txBody>
-          <a:bodyPr lIns="36576" tIns="18288" rIns="36576" bIns="18288" rtlCol="0" anchor="ctr"/>
+          <a:bodyPr lIns="27432" tIns="18288" rIns="27432" bIns="18288" rtlCol="0" anchor="ctr"/>
           <a:lstStyle/>
           <a:p>
             <a:pPr algn="ctr"/>
             <a:r>
-              <a:rPr sz="680" b="0">
-                <a:solidFill>
-                  <a:srgbClr val="0F172A"/>
-                </a:solidFill>
-                <a:latin typeface="Calibri"/>
-              </a:rPr>
-              <a:t>OptionItems</a:t>
-            </a:r>
-          </a:p>
-        </p:txBody>
-      </p:sp>
-      <p:sp>
-        <p:nvSpPr>
-          <p:cNvPr id="282" name="Rounded Rectangle 281"/>
-          <p:cNvSpPr/>
-          <p:nvPr/>
-        </p:nvSpPr>
-        <p:spPr>
-          <a:xfrm>
-            <a:off x="3364991" y="2761488"/>
-            <a:ext cx="1216152" cy="274320"/>
+              <a:rPr lang="en-US" sz="680" b="1" dirty="0" err="1">
+                <a:solidFill>
+                  <a:srgbClr val="111827"/>
+                </a:solidFill>
+              </a:rPr>
+              <a:t>Wargears</a:t>
+            </a:r>
+            <a:endParaRPr sz="680" b="1" dirty="0">
+              <a:solidFill>
+                <a:srgbClr val="111827"/>
+              </a:solidFill>
+            </a:endParaRPr>
+          </a:p>
+        </p:txBody>
+      </p:sp>
+      <p:sp>
+        <p:nvSpPr>
+          <p:cNvPr id="93" name="Rounded Rectangle 67">
+            <a:extLst>
+              <a:ext uri="{FF2B5EF4-FFF2-40B4-BE49-F238E27FC236}">
+                <a16:creationId xmlns:a16="http://schemas.microsoft.com/office/drawing/2014/main" id="{C1C27E9B-DEE2-4915-AF54-39F39D831F4A}"/>
+              </a:ext>
+            </a:extLst>
+          </p:cNvPr>
+          <p:cNvSpPr/>
+          <p:nvPr/>
+        </p:nvSpPr>
+        <p:spPr>
+          <a:xfrm>
+            <a:off x="3008376" y="2701035"/>
+            <a:ext cx="987552" cy="283464"/>
           </a:xfrm>
           <a:prstGeom prst="roundRect">
             <a:avLst/>
           </a:prstGeom>
           <a:solidFill>
-            <a:srgbClr val="FFFFFF"/>
+            <a:srgbClr val="EFF6FF"/>
           </a:solidFill>
-          <a:ln w="9525">
+          <a:ln w="12700">
             <a:solidFill>
-              <a:srgbClr val="CBD5E1"/>
+              <a:srgbClr val="3B82F6"/>
             </a:solidFill>
           </a:ln>
         </p:spPr>
@@ -29967,42 +30518,94 @@
           </a:fontRef>
         </p:style>
         <p:txBody>
-          <a:bodyPr lIns="36576" tIns="18288" rIns="36576" bIns="18288" rtlCol="0" anchor="ctr"/>
+          <a:bodyPr lIns="27432" tIns="18288" rIns="27432" bIns="18288" rtlCol="0" anchor="ctr"/>
           <a:lstStyle/>
           <a:p>
             <a:pPr algn="ctr"/>
             <a:r>
-              <a:rPr sz="680" b="0">
-                <a:solidFill>
-                  <a:srgbClr val="0F172A"/>
-                </a:solidFill>
-                <a:latin typeface="Calibri"/>
-              </a:rPr>
-              <a:t>ModelWargears</a:t>
-            </a:r>
-          </a:p>
-        </p:txBody>
-      </p:sp>
-      <p:sp>
-        <p:nvSpPr>
-          <p:cNvPr id="283" name="Rounded Rectangle 282"/>
-          <p:cNvSpPr/>
-          <p:nvPr/>
-        </p:nvSpPr>
-        <p:spPr>
-          <a:xfrm>
-            <a:off x="4690872" y="2761488"/>
-            <a:ext cx="1216152" cy="274320"/>
+              <a:rPr lang="en-US" sz="680" b="1" dirty="0">
+                <a:solidFill>
+                  <a:srgbClr val="111827"/>
+                </a:solidFill>
+              </a:rPr>
+              <a:t>Options</a:t>
+            </a:r>
+            <a:endParaRPr sz="680" b="1" dirty="0">
+              <a:solidFill>
+                <a:srgbClr val="111827"/>
+              </a:solidFill>
+            </a:endParaRPr>
+          </a:p>
+        </p:txBody>
+      </p:sp>
+      <p:cxnSp>
+        <p:nvCxnSpPr>
+          <p:cNvPr id="94" name="Connector 27">
+            <a:extLst>
+              <a:ext uri="{FF2B5EF4-FFF2-40B4-BE49-F238E27FC236}">
+                <a16:creationId xmlns:a16="http://schemas.microsoft.com/office/drawing/2014/main" id="{3BC407E2-4BA0-4A65-8E89-07DDC06C337D}"/>
+              </a:ext>
+            </a:extLst>
+          </p:cNvPr>
+          <p:cNvCxnSpPr/>
+          <p:nvPr/>
+        </p:nvCxnSpPr>
+        <p:spPr>
+          <a:xfrm>
+            <a:off x="2807208" y="2847339"/>
+            <a:ext cx="201168" cy="0"/>
+          </a:xfrm>
+          <a:prstGeom prst="line">
+            <a:avLst/>
+          </a:prstGeom>
+          <a:ln w="11430">
+            <a:solidFill>
+              <a:srgbClr val="475569"/>
+            </a:solidFill>
+            <a:tailEnd type="triangle"/>
+          </a:ln>
+        </p:spPr>
+        <p:style>
+          <a:lnRef idx="2">
+            <a:schemeClr val="accent1"/>
+          </a:lnRef>
+          <a:fillRef idx="0">
+            <a:schemeClr val="accent1"/>
+          </a:fillRef>
+          <a:effectRef idx="1">
+            <a:schemeClr val="accent1"/>
+          </a:effectRef>
+          <a:fontRef idx="minor">
+            <a:schemeClr val="tx1"/>
+          </a:fontRef>
+        </p:style>
+      </p:cxnSp>
+      <p:sp>
+        <p:nvSpPr>
+          <p:cNvPr id="95" name="Rounded Rectangle 61">
+            <a:extLst>
+              <a:ext uri="{FF2B5EF4-FFF2-40B4-BE49-F238E27FC236}">
+                <a16:creationId xmlns:a16="http://schemas.microsoft.com/office/drawing/2014/main" id="{1FCF60AF-D21B-4C6F-A480-C294B45A0B91}"/>
+              </a:ext>
+            </a:extLst>
+          </p:cNvPr>
+          <p:cNvSpPr/>
+          <p:nvPr/>
+        </p:nvSpPr>
+        <p:spPr>
+          <a:xfrm>
+            <a:off x="5410962" y="1504695"/>
+            <a:ext cx="987552" cy="283464"/>
           </a:xfrm>
           <a:prstGeom prst="roundRect">
             <a:avLst/>
           </a:prstGeom>
           <a:solidFill>
-            <a:srgbClr val="FFFFFF"/>
+            <a:srgbClr val="ECFDF5"/>
           </a:solidFill>
-          <a:ln w="9525">
+          <a:ln w="12700">
             <a:solidFill>
-              <a:srgbClr val="CBD5E1"/>
+              <a:srgbClr val="10B981"/>
             </a:solidFill>
           </a:ln>
         </p:spPr>
@@ -30021,42 +30624,52 @@
           </a:fontRef>
         </p:style>
         <p:txBody>
-          <a:bodyPr lIns="36576" tIns="18288" rIns="36576" bIns="18288" rtlCol="0" anchor="ctr"/>
+          <a:bodyPr lIns="27432" tIns="18288" rIns="27432" bIns="18288" rtlCol="0" anchor="ctr"/>
           <a:lstStyle/>
           <a:p>
             <a:pPr algn="ctr"/>
             <a:r>
-              <a:rPr sz="680" b="0">
-                <a:solidFill>
-                  <a:srgbClr val="0F172A"/>
-                </a:solidFill>
-                <a:latin typeface="Calibri"/>
-              </a:rPr>
-              <a:t>ModelAbilities</a:t>
-            </a:r>
-          </a:p>
-        </p:txBody>
-      </p:sp>
-      <p:sp>
-        <p:nvSpPr>
-          <p:cNvPr id="284" name="Rounded Rectangle 283"/>
-          <p:cNvSpPr/>
-          <p:nvPr/>
-        </p:nvSpPr>
-        <p:spPr>
-          <a:xfrm>
-            <a:off x="6556248" y="1691640"/>
-            <a:ext cx="1417320" cy="310896"/>
+              <a:rPr lang="en-US" sz="680" b="1" dirty="0">
+                <a:solidFill>
+                  <a:srgbClr val="111827"/>
+                </a:solidFill>
+              </a:rPr>
+              <a:t>Weapons</a:t>
+            </a:r>
+            <a:endParaRPr sz="680" b="1" dirty="0">
+              <a:solidFill>
+                <a:srgbClr val="111827"/>
+              </a:solidFill>
+            </a:endParaRPr>
+          </a:p>
+        </p:txBody>
+      </p:sp>
+      <p:sp>
+        <p:nvSpPr>
+          <p:cNvPr id="96" name="Rounded Rectangle 61">
+            <a:extLst>
+              <a:ext uri="{FF2B5EF4-FFF2-40B4-BE49-F238E27FC236}">
+                <a16:creationId xmlns:a16="http://schemas.microsoft.com/office/drawing/2014/main" id="{93932B9C-E41D-4232-B3D8-B6F6091BEBAE}"/>
+              </a:ext>
+            </a:extLst>
+          </p:cNvPr>
+          <p:cNvSpPr/>
+          <p:nvPr/>
+        </p:nvSpPr>
+        <p:spPr>
+          <a:xfrm>
+            <a:off x="6583680" y="1504695"/>
+            <a:ext cx="987552" cy="283464"/>
           </a:xfrm>
           <a:prstGeom prst="roundRect">
             <a:avLst/>
           </a:prstGeom>
           <a:solidFill>
-            <a:srgbClr val="FEF2F2"/>
+            <a:srgbClr val="ECFDF5"/>
           </a:solidFill>
-          <a:ln w="9525">
+          <a:ln w="12700">
             <a:solidFill>
-              <a:srgbClr val="CBD5E1"/>
+              <a:srgbClr val="10B981"/>
             </a:solidFill>
           </a:ln>
         </p:spPr>
@@ -30075,1493 +30688,22 @@
           </a:fontRef>
         </p:style>
         <p:txBody>
-          <a:bodyPr lIns="36576" tIns="18288" rIns="36576" bIns="18288" rtlCol="0" anchor="ctr"/>
+          <a:bodyPr lIns="27432" tIns="18288" rIns="27432" bIns="18288" rtlCol="0" anchor="ctr"/>
           <a:lstStyle/>
           <a:p>
             <a:pPr algn="ctr"/>
             <a:r>
-              <a:rPr sz="720" b="1">
-                <a:solidFill>
-                  <a:srgbClr val="0F172A"/>
-                </a:solidFill>
-                <a:latin typeface="Calibri"/>
-              </a:rPr>
-              <a:t>SimulationResults</a:t>
-            </a:r>
-          </a:p>
-        </p:txBody>
-      </p:sp>
-      <p:sp>
-        <p:nvSpPr>
-          <p:cNvPr id="286" name="Rounded Rectangle 285"/>
-          <p:cNvSpPr/>
-          <p:nvPr/>
-        </p:nvSpPr>
-        <p:spPr>
-          <a:xfrm>
-            <a:off x="6556248" y="2194560"/>
-            <a:ext cx="1417320" cy="310896"/>
-          </a:xfrm>
-          <a:prstGeom prst="roundRect">
-            <a:avLst/>
-          </a:prstGeom>
-          <a:solidFill>
-            <a:srgbClr val="FFFFFF"/>
-          </a:solidFill>
-          <a:ln w="9525">
-            <a:solidFill>
-              <a:srgbClr val="CBD5E1"/>
-            </a:solidFill>
-          </a:ln>
-        </p:spPr>
-        <p:style>
-          <a:lnRef idx="1">
-            <a:schemeClr val="accent1"/>
-          </a:lnRef>
-          <a:fillRef idx="3">
-            <a:schemeClr val="accent1"/>
-          </a:fillRef>
-          <a:effectRef idx="2">
-            <a:schemeClr val="accent1"/>
-          </a:effectRef>
-          <a:fontRef idx="minor">
-            <a:schemeClr val="lt1"/>
-          </a:fontRef>
-        </p:style>
-        <p:txBody>
-          <a:bodyPr lIns="36576" tIns="18288" rIns="36576" bIns="18288" rtlCol="0" anchor="ctr"/>
-          <a:lstStyle/>
-          <a:p>
-            <a:pPr algn="ctr"/>
-            <a:r>
-              <a:rPr sz="720" b="0">
-                <a:solidFill>
-                  <a:srgbClr val="0F172A"/>
-                </a:solidFill>
-                <a:latin typeface="Calibri"/>
-              </a:rPr>
-              <a:t>TurnStats</a:t>
-            </a:r>
-          </a:p>
-        </p:txBody>
-      </p:sp>
-      <p:sp>
-        <p:nvSpPr>
-          <p:cNvPr id="288" name="Rounded Rectangle 287"/>
-          <p:cNvSpPr/>
-          <p:nvPr/>
-        </p:nvSpPr>
-        <p:spPr>
-          <a:xfrm>
-            <a:off x="6556248" y="2697480"/>
-            <a:ext cx="1417320" cy="310896"/>
-          </a:xfrm>
-          <a:prstGeom prst="roundRect">
-            <a:avLst/>
-          </a:prstGeom>
-          <a:solidFill>
-            <a:srgbClr val="FFFFFF"/>
-          </a:solidFill>
-          <a:ln w="9525">
-            <a:solidFill>
-              <a:srgbClr val="CBD5E1"/>
-            </a:solidFill>
-          </a:ln>
-        </p:spPr>
-        <p:style>
-          <a:lnRef idx="1">
-            <a:schemeClr val="accent1"/>
-          </a:lnRef>
-          <a:fillRef idx="3">
-            <a:schemeClr val="accent1"/>
-          </a:fillRef>
-          <a:effectRef idx="2">
-            <a:schemeClr val="accent1"/>
-          </a:effectRef>
-          <a:fontRef idx="minor">
-            <a:schemeClr val="lt1"/>
-          </a:fontRef>
-        </p:style>
-        <p:txBody>
-          <a:bodyPr lIns="36576" tIns="18288" rIns="36576" bIns="18288" rtlCol="0" anchor="ctr"/>
-          <a:lstStyle/>
-          <a:p>
-            <a:pPr algn="ctr"/>
-            <a:r>
-              <a:rPr sz="720" b="0">
-                <a:solidFill>
-                  <a:srgbClr val="0F172A"/>
-                </a:solidFill>
-                <a:latin typeface="Calibri"/>
-              </a:rPr>
-              <a:t>WeaponStats</a:t>
-            </a:r>
-          </a:p>
-        </p:txBody>
-      </p:sp>
-      <p:sp>
-        <p:nvSpPr>
-          <p:cNvPr id="290" name="Rounded Rectangle 289"/>
-          <p:cNvSpPr/>
-          <p:nvPr/>
-        </p:nvSpPr>
-        <p:spPr>
-          <a:xfrm>
-            <a:off x="8613648" y="1664208"/>
-            <a:ext cx="1243584" cy="274320"/>
-          </a:xfrm>
-          <a:prstGeom prst="roundRect">
-            <a:avLst/>
-          </a:prstGeom>
-          <a:solidFill>
-            <a:srgbClr val="EFF6FF"/>
-          </a:solidFill>
-          <a:ln w="9525">
-            <a:solidFill>
-              <a:srgbClr val="CBD5E1"/>
-            </a:solidFill>
-          </a:ln>
-        </p:spPr>
-        <p:style>
-          <a:lnRef idx="1">
-            <a:schemeClr val="accent1"/>
-          </a:lnRef>
-          <a:fillRef idx="3">
-            <a:schemeClr val="accent1"/>
-          </a:fillRef>
-          <a:effectRef idx="2">
-            <a:schemeClr val="accent1"/>
-          </a:effectRef>
-          <a:fontRef idx="minor">
-            <a:schemeClr val="lt1"/>
-          </a:fontRef>
-        </p:style>
-        <p:txBody>
-          <a:bodyPr lIns="36576" tIns="18288" rIns="36576" bIns="18288" rtlCol="0" anchor="ctr"/>
-          <a:lstStyle/>
-          <a:p>
-            <a:pPr algn="ctr"/>
-            <a:r>
-              <a:rPr sz="650" b="1" dirty="0" err="1">
-                <a:solidFill>
-                  <a:srgbClr val="0F172A"/>
-                </a:solidFill>
-                <a:latin typeface="Calibri"/>
-              </a:rPr>
-              <a:t>AspNetUsers</a:t>
-            </a:r>
-            <a:endParaRPr sz="650" b="1" dirty="0">
+              <a:rPr lang="en-US" sz="680" b="1" dirty="0" err="1">
+                <a:solidFill>
+                  <a:srgbClr val="111827"/>
+                </a:solidFill>
+              </a:rPr>
+              <a:t>Weaponprofiles</a:t>
+            </a:r>
+            <a:endParaRPr lang="en-US" sz="680" b="1" dirty="0">
               <a:solidFill>
-                <a:srgbClr val="0F172A"/>
+                <a:srgbClr val="111827"/>
               </a:solidFill>
-              <a:latin typeface="Calibri"/>
-            </a:endParaRPr>
-          </a:p>
-        </p:txBody>
-      </p:sp>
-      <p:sp>
-        <p:nvSpPr>
-          <p:cNvPr id="291" name="Rounded Rectangle 290"/>
-          <p:cNvSpPr/>
-          <p:nvPr/>
-        </p:nvSpPr>
-        <p:spPr>
-          <a:xfrm>
-            <a:off x="9985248" y="1664208"/>
-            <a:ext cx="1243584" cy="274320"/>
-          </a:xfrm>
-          <a:prstGeom prst="roundRect">
-            <a:avLst/>
-          </a:prstGeom>
-          <a:solidFill>
-            <a:srgbClr val="EFF6FF"/>
-          </a:solidFill>
-          <a:ln w="9525">
-            <a:solidFill>
-              <a:srgbClr val="CBD5E1"/>
-            </a:solidFill>
-          </a:ln>
-        </p:spPr>
-        <p:style>
-          <a:lnRef idx="1">
-            <a:schemeClr val="accent1"/>
-          </a:lnRef>
-          <a:fillRef idx="3">
-            <a:schemeClr val="accent1"/>
-          </a:fillRef>
-          <a:effectRef idx="2">
-            <a:schemeClr val="accent1"/>
-          </a:effectRef>
-          <a:fontRef idx="minor">
-            <a:schemeClr val="lt1"/>
-          </a:fontRef>
-        </p:style>
-        <p:txBody>
-          <a:bodyPr lIns="36576" tIns="18288" rIns="36576" bIns="18288" rtlCol="0" anchor="ctr"/>
-          <a:lstStyle/>
-          <a:p>
-            <a:pPr algn="ctr"/>
-            <a:r>
-              <a:rPr sz="650" b="1">
-                <a:solidFill>
-                  <a:srgbClr val="0F172A"/>
-                </a:solidFill>
-                <a:latin typeface="Calibri"/>
-              </a:rPr>
-              <a:t>AspNetRoles</a:t>
-            </a:r>
-          </a:p>
-        </p:txBody>
-      </p:sp>
-      <p:sp>
-        <p:nvSpPr>
-          <p:cNvPr id="292" name="Rounded Rectangle 291"/>
-          <p:cNvSpPr/>
-          <p:nvPr/>
-        </p:nvSpPr>
-        <p:spPr>
-          <a:xfrm>
-            <a:off x="8613648" y="2029968"/>
-            <a:ext cx="1243584" cy="274320"/>
-          </a:xfrm>
-          <a:prstGeom prst="roundRect">
-            <a:avLst/>
-          </a:prstGeom>
-          <a:solidFill>
-            <a:srgbClr val="FFFFFF"/>
-          </a:solidFill>
-          <a:ln w="9525">
-            <a:solidFill>
-              <a:srgbClr val="CBD5E1"/>
-            </a:solidFill>
-          </a:ln>
-        </p:spPr>
-        <p:style>
-          <a:lnRef idx="1">
-            <a:schemeClr val="accent1"/>
-          </a:lnRef>
-          <a:fillRef idx="3">
-            <a:schemeClr val="accent1"/>
-          </a:fillRef>
-          <a:effectRef idx="2">
-            <a:schemeClr val="accent1"/>
-          </a:effectRef>
-          <a:fontRef idx="minor">
-            <a:schemeClr val="lt1"/>
-          </a:fontRef>
-        </p:style>
-        <p:txBody>
-          <a:bodyPr lIns="36576" tIns="18288" rIns="36576" bIns="18288" rtlCol="0" anchor="ctr"/>
-          <a:lstStyle/>
-          <a:p>
-            <a:pPr algn="ctr"/>
-            <a:r>
-              <a:rPr sz="650" b="0">
-                <a:solidFill>
-                  <a:srgbClr val="0F172A"/>
-                </a:solidFill>
-                <a:latin typeface="Calibri"/>
-              </a:rPr>
-              <a:t>AspNetUserRoles</a:t>
-            </a:r>
-          </a:p>
-        </p:txBody>
-      </p:sp>
-      <p:sp>
-        <p:nvSpPr>
-          <p:cNvPr id="293" name="Rounded Rectangle 292"/>
-          <p:cNvSpPr/>
-          <p:nvPr/>
-        </p:nvSpPr>
-        <p:spPr>
-          <a:xfrm>
-            <a:off x="9985248" y="2029968"/>
-            <a:ext cx="1243584" cy="274320"/>
-          </a:xfrm>
-          <a:prstGeom prst="roundRect">
-            <a:avLst/>
-          </a:prstGeom>
-          <a:solidFill>
-            <a:srgbClr val="FFFFFF"/>
-          </a:solidFill>
-          <a:ln w="9525">
-            <a:solidFill>
-              <a:srgbClr val="CBD5E1"/>
-            </a:solidFill>
-          </a:ln>
-        </p:spPr>
-        <p:style>
-          <a:lnRef idx="1">
-            <a:schemeClr val="accent1"/>
-          </a:lnRef>
-          <a:fillRef idx="3">
-            <a:schemeClr val="accent1"/>
-          </a:fillRef>
-          <a:effectRef idx="2">
-            <a:schemeClr val="accent1"/>
-          </a:effectRef>
-          <a:fontRef idx="minor">
-            <a:schemeClr val="lt1"/>
-          </a:fontRef>
-        </p:style>
-        <p:txBody>
-          <a:bodyPr lIns="36576" tIns="18288" rIns="36576" bIns="18288" rtlCol="0" anchor="ctr"/>
-          <a:lstStyle/>
-          <a:p>
-            <a:pPr algn="ctr"/>
-            <a:r>
-              <a:rPr sz="650" b="0">
-                <a:solidFill>
-                  <a:srgbClr val="0F172A"/>
-                </a:solidFill>
-                <a:latin typeface="Calibri"/>
-              </a:rPr>
-              <a:t>AspNetUserClaims</a:t>
-            </a:r>
-          </a:p>
-        </p:txBody>
-      </p:sp>
-      <p:sp>
-        <p:nvSpPr>
-          <p:cNvPr id="294" name="Rounded Rectangle 293"/>
-          <p:cNvSpPr/>
-          <p:nvPr/>
-        </p:nvSpPr>
-        <p:spPr>
-          <a:xfrm>
-            <a:off x="8613648" y="2395728"/>
-            <a:ext cx="1243584" cy="274320"/>
-          </a:xfrm>
-          <a:prstGeom prst="roundRect">
-            <a:avLst/>
-          </a:prstGeom>
-          <a:solidFill>
-            <a:srgbClr val="FFFFFF"/>
-          </a:solidFill>
-          <a:ln w="9525">
-            <a:solidFill>
-              <a:srgbClr val="CBD5E1"/>
-            </a:solidFill>
-          </a:ln>
-        </p:spPr>
-        <p:style>
-          <a:lnRef idx="1">
-            <a:schemeClr val="accent1"/>
-          </a:lnRef>
-          <a:fillRef idx="3">
-            <a:schemeClr val="accent1"/>
-          </a:fillRef>
-          <a:effectRef idx="2">
-            <a:schemeClr val="accent1"/>
-          </a:effectRef>
-          <a:fontRef idx="minor">
-            <a:schemeClr val="lt1"/>
-          </a:fontRef>
-        </p:style>
-        <p:txBody>
-          <a:bodyPr lIns="36576" tIns="18288" rIns="36576" bIns="18288" rtlCol="0" anchor="ctr"/>
-          <a:lstStyle/>
-          <a:p>
-            <a:pPr algn="ctr"/>
-            <a:r>
-              <a:rPr sz="650" b="0">
-                <a:solidFill>
-                  <a:srgbClr val="0F172A"/>
-                </a:solidFill>
-                <a:latin typeface="Calibri"/>
-              </a:rPr>
-              <a:t>AspNetUserLogins</a:t>
-            </a:r>
-          </a:p>
-        </p:txBody>
-      </p:sp>
-      <p:sp>
-        <p:nvSpPr>
-          <p:cNvPr id="295" name="Rounded Rectangle 294"/>
-          <p:cNvSpPr/>
-          <p:nvPr/>
-        </p:nvSpPr>
-        <p:spPr>
-          <a:xfrm>
-            <a:off x="9985248" y="2395728"/>
-            <a:ext cx="1243584" cy="274320"/>
-          </a:xfrm>
-          <a:prstGeom prst="roundRect">
-            <a:avLst/>
-          </a:prstGeom>
-          <a:solidFill>
-            <a:srgbClr val="FFFFFF"/>
-          </a:solidFill>
-          <a:ln w="9525">
-            <a:solidFill>
-              <a:srgbClr val="CBD5E1"/>
-            </a:solidFill>
-          </a:ln>
-        </p:spPr>
-        <p:style>
-          <a:lnRef idx="1">
-            <a:schemeClr val="accent1"/>
-          </a:lnRef>
-          <a:fillRef idx="3">
-            <a:schemeClr val="accent1"/>
-          </a:fillRef>
-          <a:effectRef idx="2">
-            <a:schemeClr val="accent1"/>
-          </a:effectRef>
-          <a:fontRef idx="minor">
-            <a:schemeClr val="lt1"/>
-          </a:fontRef>
-        </p:style>
-        <p:txBody>
-          <a:bodyPr lIns="36576" tIns="18288" rIns="36576" bIns="18288" rtlCol="0" anchor="ctr"/>
-          <a:lstStyle/>
-          <a:p>
-            <a:pPr algn="ctr"/>
-            <a:r>
-              <a:rPr sz="650" b="0">
-                <a:solidFill>
-                  <a:srgbClr val="0F172A"/>
-                </a:solidFill>
-                <a:latin typeface="Calibri"/>
-              </a:rPr>
-              <a:t>AspNetUserTokens</a:t>
-            </a:r>
-          </a:p>
-        </p:txBody>
-      </p:sp>
-      <p:sp>
-        <p:nvSpPr>
-          <p:cNvPr id="296" name="Rounded Rectangle 295"/>
-          <p:cNvSpPr/>
-          <p:nvPr/>
-        </p:nvSpPr>
-        <p:spPr>
-          <a:xfrm>
-            <a:off x="8613648" y="2761488"/>
-            <a:ext cx="1243584" cy="274320"/>
-          </a:xfrm>
-          <a:prstGeom prst="roundRect">
-            <a:avLst/>
-          </a:prstGeom>
-          <a:solidFill>
-            <a:srgbClr val="FFFFFF"/>
-          </a:solidFill>
-          <a:ln w="9525">
-            <a:solidFill>
-              <a:srgbClr val="CBD5E1"/>
-            </a:solidFill>
-          </a:ln>
-        </p:spPr>
-        <p:style>
-          <a:lnRef idx="1">
-            <a:schemeClr val="accent1"/>
-          </a:lnRef>
-          <a:fillRef idx="3">
-            <a:schemeClr val="accent1"/>
-          </a:fillRef>
-          <a:effectRef idx="2">
-            <a:schemeClr val="accent1"/>
-          </a:effectRef>
-          <a:fontRef idx="minor">
-            <a:schemeClr val="lt1"/>
-          </a:fontRef>
-        </p:style>
-        <p:txBody>
-          <a:bodyPr lIns="36576" tIns="18288" rIns="36576" bIns="18288" rtlCol="0" anchor="ctr"/>
-          <a:lstStyle/>
-          <a:p>
-            <a:pPr algn="ctr"/>
-            <a:r>
-              <a:rPr sz="650" b="0">
-                <a:solidFill>
-                  <a:srgbClr val="0F172A"/>
-                </a:solidFill>
-                <a:latin typeface="Calibri"/>
-              </a:rPr>
-              <a:t>AspNetRoleClaims</a:t>
-            </a:r>
-          </a:p>
-        </p:txBody>
-      </p:sp>
-      <p:sp>
-        <p:nvSpPr>
-          <p:cNvPr id="297" name="Rounded Rectangle 296"/>
-          <p:cNvSpPr/>
-          <p:nvPr/>
-        </p:nvSpPr>
-        <p:spPr>
-          <a:xfrm>
-            <a:off x="713232" y="3913632"/>
-            <a:ext cx="804672" cy="274320"/>
-          </a:xfrm>
-          <a:prstGeom prst="roundRect">
-            <a:avLst/>
-          </a:prstGeom>
-          <a:solidFill>
-            <a:srgbClr val="FFFFFF"/>
-          </a:solidFill>
-          <a:ln w="9525">
-            <a:solidFill>
-              <a:srgbClr val="CBD5E1"/>
-            </a:solidFill>
-          </a:ln>
-        </p:spPr>
-        <p:style>
-          <a:lnRef idx="1">
-            <a:schemeClr val="accent1"/>
-          </a:lnRef>
-          <a:fillRef idx="3">
-            <a:schemeClr val="accent1"/>
-          </a:fillRef>
-          <a:effectRef idx="2">
-            <a:schemeClr val="accent1"/>
-          </a:effectRef>
-          <a:fontRef idx="minor">
-            <a:schemeClr val="lt1"/>
-          </a:fontRef>
-        </p:style>
-        <p:txBody>
-          <a:bodyPr lIns="36576" tIns="18288" rIns="36576" bIns="18288" rtlCol="0" anchor="ctr"/>
-          <a:lstStyle/>
-          <a:p>
-            <a:pPr algn="ctr"/>
-            <a:r>
-              <a:rPr sz="520" b="0">
-                <a:solidFill>
-                  <a:srgbClr val="0F172A"/>
-                </a:solidFill>
-                <a:latin typeface="Calibri"/>
-              </a:rPr>
-              <a:t>__EFMigrationsHistory</a:t>
-            </a:r>
-          </a:p>
-        </p:txBody>
-      </p:sp>
-      <p:sp>
-        <p:nvSpPr>
-          <p:cNvPr id="298" name="Rounded Rectangle 297"/>
-          <p:cNvSpPr/>
-          <p:nvPr/>
-        </p:nvSpPr>
-        <p:spPr>
-          <a:xfrm>
-            <a:off x="1545336" y="3913632"/>
-            <a:ext cx="804672" cy="274320"/>
-          </a:xfrm>
-          <a:prstGeom prst="roundRect">
-            <a:avLst/>
-          </a:prstGeom>
-          <a:solidFill>
-            <a:srgbClr val="FFFFFF"/>
-          </a:solidFill>
-          <a:ln w="9525">
-            <a:solidFill>
-              <a:srgbClr val="CBD5E1"/>
-            </a:solidFill>
-          </a:ln>
-        </p:spPr>
-        <p:style>
-          <a:lnRef idx="1">
-            <a:schemeClr val="accent1"/>
-          </a:lnRef>
-          <a:fillRef idx="3">
-            <a:schemeClr val="accent1"/>
-          </a:fillRef>
-          <a:effectRef idx="2">
-            <a:schemeClr val="accent1"/>
-          </a:effectRef>
-          <a:fontRef idx="minor">
-            <a:schemeClr val="lt1"/>
-          </a:fontRef>
-        </p:style>
-        <p:txBody>
-          <a:bodyPr lIns="36576" tIns="18288" rIns="36576" bIns="18288" rtlCol="0" anchor="ctr"/>
-          <a:lstStyle/>
-          <a:p>
-            <a:pPr algn="ctr"/>
-            <a:r>
-              <a:rPr sz="520" b="0">
-                <a:solidFill>
-                  <a:srgbClr val="0F172A"/>
-                </a:solidFill>
-                <a:latin typeface="Calibri"/>
-              </a:rPr>
-              <a:t>__EFMigrationsLock</a:t>
-            </a:r>
-          </a:p>
-        </p:txBody>
-      </p:sp>
-      <p:sp>
-        <p:nvSpPr>
-          <p:cNvPr id="299" name="Rounded Rectangle 298"/>
-          <p:cNvSpPr/>
-          <p:nvPr/>
-        </p:nvSpPr>
-        <p:spPr>
-          <a:xfrm>
-            <a:off x="2377440" y="3913632"/>
-            <a:ext cx="749808" cy="274320"/>
-          </a:xfrm>
-          <a:prstGeom prst="roundRect">
-            <a:avLst/>
-          </a:prstGeom>
-          <a:solidFill>
-            <a:srgbClr val="FFFFFF"/>
-          </a:solidFill>
-          <a:ln w="9525">
-            <a:solidFill>
-              <a:srgbClr val="CBD5E1"/>
-            </a:solidFill>
-          </a:ln>
-        </p:spPr>
-        <p:style>
-          <a:lnRef idx="1">
-            <a:schemeClr val="accent1"/>
-          </a:lnRef>
-          <a:fillRef idx="3">
-            <a:schemeClr val="accent1"/>
-          </a:fillRef>
-          <a:effectRef idx="2">
-            <a:schemeClr val="accent1"/>
-          </a:effectRef>
-          <a:fontRef idx="minor">
-            <a:schemeClr val="lt1"/>
-          </a:fontRef>
-        </p:style>
-        <p:txBody>
-          <a:bodyPr lIns="36576" tIns="18288" rIns="36576" bIns="18288" rtlCol="0" anchor="ctr"/>
-          <a:lstStyle/>
-          <a:p>
-            <a:pPr algn="ctr"/>
-            <a:r>
-              <a:rPr sz="580" b="0">
-                <a:solidFill>
-                  <a:srgbClr val="0F172A"/>
-                </a:solidFill>
-                <a:latin typeface="Calibri"/>
-              </a:rPr>
-              <a:t>sqlite_sequence</a:t>
-            </a:r>
-          </a:p>
-        </p:txBody>
-      </p:sp>
-      <p:sp>
-        <p:nvSpPr>
-          <p:cNvPr id="300" name="TextBox 299"/>
-          <p:cNvSpPr txBox="1"/>
-          <p:nvPr/>
-        </p:nvSpPr>
-        <p:spPr>
-          <a:xfrm>
-            <a:off x="713232" y="4279392"/>
-            <a:ext cx="1973425" cy="243143"/>
-          </a:xfrm>
-          <a:prstGeom prst="rect">
-            <a:avLst/>
-          </a:prstGeom>
-          <a:noFill/>
-        </p:spPr>
-        <p:txBody>
-          <a:bodyPr wrap="none" lIns="36576" tIns="18288" rIns="36576" bIns="18288">
-            <a:spAutoFit/>
-          </a:bodyPr>
-          <a:lstStyle/>
-          <a:p>
-            <a:pPr algn="l"/>
-            <a:r>
-              <a:rPr sz="670" b="0" dirty="0" err="1">
-                <a:solidFill>
-                  <a:srgbClr val="475569"/>
-                </a:solidFill>
-                <a:latin typeface="Calibri"/>
-              </a:rPr>
-              <a:t>Служебные</a:t>
-            </a:r>
-            <a:r>
-              <a:rPr sz="670" b="0" dirty="0">
-                <a:solidFill>
-                  <a:srgbClr val="475569"/>
-                </a:solidFill>
-                <a:latin typeface="Calibri"/>
-              </a:rPr>
-              <a:t> </a:t>
-            </a:r>
-            <a:r>
-              <a:rPr sz="670" b="0" dirty="0" err="1">
-                <a:solidFill>
-                  <a:srgbClr val="475569"/>
-                </a:solidFill>
-                <a:latin typeface="Calibri"/>
-              </a:rPr>
-              <a:t>таблицы</a:t>
-            </a:r>
-            <a:r>
-              <a:rPr sz="670" b="0" dirty="0">
-                <a:solidFill>
-                  <a:srgbClr val="475569"/>
-                </a:solidFill>
-                <a:latin typeface="Calibri"/>
-              </a:rPr>
-              <a:t> </a:t>
-            </a:r>
-            <a:r>
-              <a:rPr sz="670" b="0" dirty="0" err="1">
-                <a:solidFill>
-                  <a:srgbClr val="475569"/>
-                </a:solidFill>
-                <a:latin typeface="Calibri"/>
-              </a:rPr>
-              <a:t>миграций</a:t>
-            </a:r>
-            <a:r>
-              <a:rPr sz="670" b="0" dirty="0">
-                <a:solidFill>
-                  <a:srgbClr val="475569"/>
-                </a:solidFill>
-                <a:latin typeface="Calibri"/>
-              </a:rPr>
-              <a:t> и SQLite не </a:t>
-            </a:r>
-            <a:r>
-              <a:rPr sz="670" b="0" dirty="0" err="1">
-                <a:solidFill>
-                  <a:srgbClr val="475569"/>
-                </a:solidFill>
-                <a:latin typeface="Calibri"/>
-              </a:rPr>
-              <a:t>связаны</a:t>
-            </a:r>
-            <a:r>
-              <a:rPr sz="670" b="0" dirty="0">
-                <a:solidFill>
-                  <a:srgbClr val="475569"/>
-                </a:solidFill>
-                <a:latin typeface="Calibri"/>
-              </a:rPr>
-              <a:t> </a:t>
-            </a:r>
-            <a:endParaRPr lang="en-US" sz="670" b="0" dirty="0">
-              <a:solidFill>
-                <a:srgbClr val="475569"/>
-              </a:solidFill>
-              <a:latin typeface="Calibri"/>
-            </a:endParaRPr>
-          </a:p>
-          <a:p>
-            <a:pPr algn="l"/>
-            <a:r>
-              <a:rPr sz="670" b="0" dirty="0">
-                <a:solidFill>
-                  <a:srgbClr val="475569"/>
-                </a:solidFill>
-                <a:latin typeface="Calibri"/>
-              </a:rPr>
-              <a:t>с </a:t>
-            </a:r>
-            <a:r>
-              <a:rPr sz="670" b="0" dirty="0" err="1">
-                <a:solidFill>
-                  <a:srgbClr val="475569"/>
-                </a:solidFill>
-                <a:latin typeface="Calibri"/>
-              </a:rPr>
-              <a:t>предметной</a:t>
-            </a:r>
-            <a:r>
-              <a:rPr sz="670" b="0" dirty="0">
-                <a:solidFill>
-                  <a:srgbClr val="475569"/>
-                </a:solidFill>
-                <a:latin typeface="Calibri"/>
-              </a:rPr>
-              <a:t> </a:t>
-            </a:r>
-            <a:r>
-              <a:rPr sz="670" b="0" dirty="0" err="1">
-                <a:solidFill>
-                  <a:srgbClr val="475569"/>
-                </a:solidFill>
-                <a:latin typeface="Calibri"/>
-              </a:rPr>
-              <a:t>областью</a:t>
-            </a:r>
-            <a:r>
-              <a:rPr sz="670" b="0" dirty="0">
-                <a:solidFill>
-                  <a:srgbClr val="475569"/>
-                </a:solidFill>
-                <a:latin typeface="Calibri"/>
-              </a:rPr>
-              <a:t>.</a:t>
-            </a:r>
-          </a:p>
-        </p:txBody>
-      </p:sp>
-      <p:sp>
-        <p:nvSpPr>
-          <p:cNvPr id="301" name="TextBox 300"/>
-          <p:cNvSpPr txBox="1"/>
-          <p:nvPr/>
-        </p:nvSpPr>
-        <p:spPr>
-          <a:xfrm>
-            <a:off x="3703320" y="3913632"/>
-            <a:ext cx="3611880" cy="1371600"/>
-          </a:xfrm>
-          <a:prstGeom prst="rect">
-            <a:avLst/>
-          </a:prstGeom>
-          <a:noFill/>
-        </p:spPr>
-        <p:txBody>
-          <a:bodyPr wrap="none" lIns="36576" tIns="18288" rIns="36576" bIns="18288">
-            <a:spAutoFit/>
-          </a:bodyPr>
-          <a:lstStyle/>
-          <a:p>
-            <a:pPr algn="l"/>
-            <a:r>
-              <a:rPr sz="710" b="0" dirty="0">
-                <a:solidFill>
-                  <a:srgbClr val="0F172A"/>
-                </a:solidFill>
-                <a:latin typeface="Calibri"/>
-              </a:rPr>
-              <a:t>• Units —1:N→ </a:t>
-            </a:r>
-            <a:r>
-              <a:rPr sz="710" b="0" dirty="0" err="1">
-                <a:solidFill>
-                  <a:srgbClr val="0F172A"/>
-                </a:solidFill>
-                <a:latin typeface="Calibri"/>
-              </a:rPr>
-              <a:t>UnitModels</a:t>
-            </a:r>
-            <a:r>
-              <a:rPr sz="710" b="0" dirty="0">
-                <a:solidFill>
-                  <a:srgbClr val="0F172A"/>
-                </a:solidFill>
-                <a:latin typeface="Calibri"/>
-              </a:rPr>
-              <a:t> —N:1→ Models
-• Units —1:N→ </a:t>
-            </a:r>
-            <a:r>
-              <a:rPr sz="710" b="0" dirty="0" err="1">
-                <a:solidFill>
-                  <a:srgbClr val="0F172A"/>
-                </a:solidFill>
-                <a:latin typeface="Calibri"/>
-              </a:rPr>
-              <a:t>UnitKeywords</a:t>
-            </a:r>
-            <a:r>
-              <a:rPr sz="710" b="0" dirty="0">
-                <a:solidFill>
-                  <a:srgbClr val="0F172A"/>
-                </a:solidFill>
-                <a:latin typeface="Calibri"/>
-              </a:rPr>
-              <a:t> —N:1→ Keywords
-• Units —1:N→ </a:t>
-            </a:r>
-            <a:r>
-              <a:rPr sz="710" b="0" dirty="0" err="1">
-                <a:solidFill>
-                  <a:srgbClr val="0F172A"/>
-                </a:solidFill>
-                <a:latin typeface="Calibri"/>
-              </a:rPr>
-              <a:t>UnitAbilities</a:t>
-            </a:r>
-            <a:r>
-              <a:rPr sz="710" b="0" dirty="0">
-                <a:solidFill>
-                  <a:srgbClr val="0F172A"/>
-                </a:solidFill>
-                <a:latin typeface="Calibri"/>
-              </a:rPr>
-              <a:t> —N:1→ Abilities
-• Units —1:N→ </a:t>
-            </a:r>
-            <a:r>
-              <a:rPr sz="710" b="0" dirty="0" err="1">
-                <a:solidFill>
-                  <a:srgbClr val="0F172A"/>
-                </a:solidFill>
-                <a:latin typeface="Calibri"/>
-              </a:rPr>
-              <a:t>UnitOptions</a:t>
-            </a:r>
-            <a:r>
-              <a:rPr sz="710" b="0" dirty="0">
-                <a:solidFill>
-                  <a:srgbClr val="0F172A"/>
-                </a:solidFill>
-                <a:latin typeface="Calibri"/>
-              </a:rPr>
-              <a:t> —1:N→ </a:t>
-            </a:r>
-            <a:r>
-              <a:rPr sz="710" b="0" dirty="0" err="1">
-                <a:solidFill>
-                  <a:srgbClr val="0F172A"/>
-                </a:solidFill>
-                <a:latin typeface="Calibri"/>
-              </a:rPr>
-              <a:t>OptionItems</a:t>
-            </a:r>
-            <a:r>
-              <a:rPr sz="710" b="0" dirty="0">
-                <a:solidFill>
-                  <a:srgbClr val="0F172A"/>
-                </a:solidFill>
-                <a:latin typeface="Calibri"/>
-              </a:rPr>
-              <a:t>
-• </a:t>
-            </a:r>
-            <a:r>
-              <a:rPr sz="710" b="0" dirty="0" err="1">
-                <a:solidFill>
-                  <a:srgbClr val="0F172A"/>
-                </a:solidFill>
-                <a:latin typeface="Calibri"/>
-              </a:rPr>
-              <a:t>OptionItems</a:t>
-            </a:r>
-            <a:r>
-              <a:rPr sz="710" b="0" dirty="0">
-                <a:solidFill>
-                  <a:srgbClr val="0F172A"/>
-                </a:solidFill>
-                <a:latin typeface="Calibri"/>
-              </a:rPr>
-              <a:t> —N:1→ Weapons / </a:t>
-            </a:r>
-            <a:r>
-              <a:rPr sz="710" b="0" dirty="0" err="1">
-                <a:solidFill>
-                  <a:srgbClr val="0F172A"/>
-                </a:solidFill>
-                <a:latin typeface="Calibri"/>
-              </a:rPr>
-              <a:t>Wargears</a:t>
-            </a:r>
-            <a:endParaRPr sz="710" b="0" dirty="0">
-              <a:solidFill>
-                <a:srgbClr val="0F172A"/>
-              </a:solidFill>
-              <a:latin typeface="Calibri"/>
-            </a:endParaRPr>
-          </a:p>
-        </p:txBody>
-      </p:sp>
-      <p:sp>
-        <p:nvSpPr>
-          <p:cNvPr id="302" name="TextBox 301"/>
-          <p:cNvSpPr txBox="1"/>
-          <p:nvPr/>
-        </p:nvSpPr>
-        <p:spPr>
-          <a:xfrm>
-            <a:off x="7360920" y="3913632"/>
-            <a:ext cx="3886200" cy="1481328"/>
-          </a:xfrm>
-          <a:prstGeom prst="rect">
-            <a:avLst/>
-          </a:prstGeom>
-          <a:noFill/>
-        </p:spPr>
-        <p:txBody>
-          <a:bodyPr wrap="none" lIns="36576" tIns="18288" rIns="36576" bIns="18288">
-            <a:spAutoFit/>
-          </a:bodyPr>
-          <a:lstStyle/>
-          <a:p>
-            <a:pPr algn="l"/>
-            <a:r>
-              <a:rPr sz="710" b="0">
-                <a:solidFill>
-                  <a:srgbClr val="0F172A"/>
-                </a:solidFill>
-                <a:latin typeface="Calibri"/>
-              </a:rPr>
-              <a:t>• Models —1:N→ ModelWeapons —N:1→ Weapons
-• Models —1:N→ ModelWargears —N:1→ Wargears
-• Weapons —1:N→ WeaponProfiles —1:N→ WeaponProfileAbilities —N:1→ Abilities
-• SimulationResults —1:N→ TurnStats —1:N→ WeaponStats
-• AspNetUsers / AspNetRoles —1:N→ claims, tokens, roles</a:t>
-            </a:r>
-          </a:p>
-        </p:txBody>
-      </p:sp>
-      <p:sp>
-        <p:nvSpPr>
-          <p:cNvPr id="303" name="Rounded Rectangle 302"/>
-          <p:cNvSpPr/>
-          <p:nvPr/>
-        </p:nvSpPr>
-        <p:spPr>
-          <a:xfrm>
-            <a:off x="3703320" y="5577840"/>
-            <a:ext cx="7498079" cy="320040"/>
-          </a:xfrm>
-          <a:prstGeom prst="roundRect">
-            <a:avLst/>
-          </a:prstGeom>
-          <a:solidFill>
-            <a:srgbClr val="EFF6FF"/>
-          </a:solidFill>
-          <a:ln w="9525">
-            <a:solidFill>
-              <a:srgbClr val="93C5FD"/>
-            </a:solidFill>
-          </a:ln>
-        </p:spPr>
-        <p:style>
-          <a:lnRef idx="1">
-            <a:schemeClr val="accent1"/>
-          </a:lnRef>
-          <a:fillRef idx="3">
-            <a:schemeClr val="accent1"/>
-          </a:fillRef>
-          <a:effectRef idx="2">
-            <a:schemeClr val="accent1"/>
-          </a:effectRef>
-          <a:fontRef idx="minor">
-            <a:schemeClr val="lt1"/>
-          </a:fontRef>
-        </p:style>
-        <p:txBody>
-          <a:bodyPr lIns="36576" tIns="18288" rIns="36576" bIns="18288" rtlCol="0" anchor="ctr"/>
-          <a:lstStyle/>
-          <a:p>
-            <a:pPr algn="ctr"/>
-            <a:r>
-              <a:rPr sz="780" b="1" dirty="0">
-                <a:solidFill>
-                  <a:srgbClr val="111827"/>
-                </a:solidFill>
-                <a:latin typeface="Calibri"/>
-              </a:rPr>
-              <a:t>M:N </a:t>
-            </a:r>
-            <a:r>
-              <a:rPr sz="780" b="1" dirty="0" err="1">
-                <a:solidFill>
-                  <a:srgbClr val="111827"/>
-                </a:solidFill>
-                <a:latin typeface="Calibri"/>
-              </a:rPr>
-              <a:t>связи</a:t>
-            </a:r>
-            <a:r>
-              <a:rPr sz="780" b="1" dirty="0">
-                <a:solidFill>
-                  <a:srgbClr val="111827"/>
-                </a:solidFill>
-                <a:latin typeface="Calibri"/>
-              </a:rPr>
-              <a:t> </a:t>
-            </a:r>
-            <a:r>
-              <a:rPr sz="780" b="1" dirty="0" err="1">
-                <a:solidFill>
-                  <a:srgbClr val="111827"/>
-                </a:solidFill>
-                <a:latin typeface="Calibri"/>
-              </a:rPr>
-              <a:t>реализованы</a:t>
-            </a:r>
-            <a:r>
-              <a:rPr sz="780" b="1" dirty="0">
-                <a:solidFill>
-                  <a:srgbClr val="111827"/>
-                </a:solidFill>
-                <a:latin typeface="Calibri"/>
-              </a:rPr>
-              <a:t> </a:t>
-            </a:r>
-            <a:r>
-              <a:rPr sz="780" b="1" dirty="0" err="1">
-                <a:solidFill>
-                  <a:srgbClr val="111827"/>
-                </a:solidFill>
-                <a:latin typeface="Calibri"/>
-              </a:rPr>
-              <a:t>через</a:t>
-            </a:r>
-            <a:r>
-              <a:rPr sz="780" b="1" dirty="0">
-                <a:solidFill>
-                  <a:srgbClr val="111827"/>
-                </a:solidFill>
-                <a:latin typeface="Calibri"/>
-              </a:rPr>
-              <a:t> </a:t>
-            </a:r>
-            <a:r>
-              <a:rPr lang="ru-RU" sz="780" b="1" dirty="0">
-                <a:solidFill>
-                  <a:srgbClr val="111827"/>
-                </a:solidFill>
-                <a:latin typeface="Calibri"/>
-              </a:rPr>
-              <a:t>ассоциативные</a:t>
-            </a:r>
-            <a:r>
-              <a:rPr sz="780" b="1" dirty="0">
-                <a:solidFill>
-                  <a:srgbClr val="111827"/>
-                </a:solidFill>
-                <a:latin typeface="Calibri"/>
-              </a:rPr>
-              <a:t> </a:t>
-            </a:r>
-            <a:r>
-              <a:rPr sz="780" b="1" dirty="0" err="1">
-                <a:solidFill>
-                  <a:srgbClr val="111827"/>
-                </a:solidFill>
-                <a:latin typeface="Calibri"/>
-              </a:rPr>
-              <a:t>таблицы</a:t>
-            </a:r>
-            <a:r>
-              <a:rPr sz="780" b="1" dirty="0">
-                <a:solidFill>
-                  <a:srgbClr val="111827"/>
-                </a:solidFill>
-                <a:latin typeface="Calibri"/>
-              </a:rPr>
-              <a:t>: </a:t>
-            </a:r>
-            <a:r>
-              <a:rPr sz="780" b="1" dirty="0" err="1">
-                <a:solidFill>
-                  <a:srgbClr val="111827"/>
-                </a:solidFill>
-                <a:latin typeface="Calibri"/>
-              </a:rPr>
-              <a:t>UnitModels</a:t>
-            </a:r>
-            <a:r>
-              <a:rPr sz="780" b="1" dirty="0">
-                <a:solidFill>
-                  <a:srgbClr val="111827"/>
-                </a:solidFill>
-                <a:latin typeface="Calibri"/>
-              </a:rPr>
-              <a:t>, </a:t>
-            </a:r>
-            <a:r>
-              <a:rPr sz="780" b="1" dirty="0" err="1">
-                <a:solidFill>
-                  <a:srgbClr val="111827"/>
-                </a:solidFill>
-                <a:latin typeface="Calibri"/>
-              </a:rPr>
-              <a:t>ModelWeapons</a:t>
-            </a:r>
-            <a:r>
-              <a:rPr sz="780" b="1" dirty="0">
-                <a:solidFill>
-                  <a:srgbClr val="111827"/>
-                </a:solidFill>
-                <a:latin typeface="Calibri"/>
-              </a:rPr>
-              <a:t>, </a:t>
-            </a:r>
-            <a:r>
-              <a:rPr sz="780" b="1" dirty="0" err="1">
-                <a:solidFill>
-                  <a:srgbClr val="111827"/>
-                </a:solidFill>
-                <a:latin typeface="Calibri"/>
-              </a:rPr>
-              <a:t>UnitKeywords</a:t>
-            </a:r>
-            <a:r>
-              <a:rPr sz="780" b="1" dirty="0">
-                <a:solidFill>
-                  <a:srgbClr val="111827"/>
-                </a:solidFill>
-                <a:latin typeface="Calibri"/>
-              </a:rPr>
-              <a:t>, </a:t>
-            </a:r>
-            <a:r>
-              <a:rPr sz="780" b="1" dirty="0" err="1">
-                <a:solidFill>
-                  <a:srgbClr val="111827"/>
-                </a:solidFill>
-                <a:latin typeface="Calibri"/>
-              </a:rPr>
-              <a:t>UnitAbilities</a:t>
-            </a:r>
-            <a:r>
-              <a:rPr sz="780" b="1" dirty="0">
-                <a:solidFill>
-                  <a:srgbClr val="111827"/>
-                </a:solidFill>
-                <a:latin typeface="Calibri"/>
-              </a:rPr>
-              <a:t>, </a:t>
-            </a:r>
-            <a:r>
-              <a:rPr sz="780" b="1" dirty="0" err="1">
-                <a:solidFill>
-                  <a:srgbClr val="111827"/>
-                </a:solidFill>
-                <a:latin typeface="Calibri"/>
-              </a:rPr>
-              <a:t>ModelAbilities</a:t>
-            </a:r>
-            <a:r>
-              <a:rPr sz="780" b="1" dirty="0">
-                <a:solidFill>
-                  <a:srgbClr val="111827"/>
-                </a:solidFill>
-                <a:latin typeface="Calibri"/>
-              </a:rPr>
-              <a:t>, </a:t>
-            </a:r>
-            <a:r>
-              <a:rPr sz="780" b="1" dirty="0" err="1">
-                <a:solidFill>
-                  <a:srgbClr val="111827"/>
-                </a:solidFill>
-                <a:latin typeface="Calibri"/>
-              </a:rPr>
-              <a:t>WeaponProfileAbilities</a:t>
-            </a:r>
-            <a:r>
-              <a:rPr sz="780" b="1" dirty="0">
-                <a:solidFill>
-                  <a:srgbClr val="111827"/>
-                </a:solidFill>
-                <a:latin typeface="Calibri"/>
-              </a:rPr>
-              <a:t> и </a:t>
-            </a:r>
-            <a:r>
-              <a:rPr sz="780" b="1" dirty="0" err="1">
-                <a:solidFill>
-                  <a:srgbClr val="111827"/>
-                </a:solidFill>
-                <a:latin typeface="Calibri"/>
-              </a:rPr>
-              <a:t>др</a:t>
-            </a:r>
-            <a:r>
-              <a:rPr sz="780" b="1" dirty="0">
-                <a:solidFill>
-                  <a:srgbClr val="111827"/>
-                </a:solidFill>
-                <a:latin typeface="Calibri"/>
-              </a:rPr>
-              <a:t>.</a:t>
-            </a:r>
-          </a:p>
-        </p:txBody>
-      </p:sp>
-      <p:sp>
-        <p:nvSpPr>
-          <p:cNvPr id="55" name="Rounded Rectangle 267">
-            <a:extLst>
-              <a:ext uri="{FF2B5EF4-FFF2-40B4-BE49-F238E27FC236}">
-                <a16:creationId xmlns:a16="http://schemas.microsoft.com/office/drawing/2014/main" id="{4F8C3C9B-FBFE-49CF-9BC3-3689E659767F}"/>
-              </a:ext>
-            </a:extLst>
-          </p:cNvPr>
-          <p:cNvSpPr/>
-          <p:nvPr/>
-        </p:nvSpPr>
-        <p:spPr>
-          <a:xfrm>
-            <a:off x="708660" y="2032254"/>
-            <a:ext cx="1216152" cy="274320"/>
-          </a:xfrm>
-          <a:prstGeom prst="roundRect">
-            <a:avLst/>
-          </a:prstGeom>
-          <a:solidFill>
-            <a:srgbClr val="ECFDF5"/>
-          </a:solidFill>
-          <a:ln w="9525">
-            <a:solidFill>
-              <a:srgbClr val="CBD5E1"/>
-            </a:solidFill>
-          </a:ln>
-        </p:spPr>
-        <p:style>
-          <a:lnRef idx="1">
-            <a:schemeClr val="accent1"/>
-          </a:lnRef>
-          <a:fillRef idx="3">
-            <a:schemeClr val="accent1"/>
-          </a:fillRef>
-          <a:effectRef idx="2">
-            <a:schemeClr val="accent1"/>
-          </a:effectRef>
-          <a:fontRef idx="minor">
-            <a:schemeClr val="lt1"/>
-          </a:fontRef>
-        </p:style>
-        <p:txBody>
-          <a:bodyPr lIns="36576" tIns="18288" rIns="36576" bIns="18288" rtlCol="0" anchor="ctr"/>
-          <a:lstStyle/>
-          <a:p>
-            <a:pPr algn="ctr"/>
-            <a:r>
-              <a:rPr lang="en-US" sz="680" b="1" dirty="0">
-                <a:solidFill>
-                  <a:srgbClr val="0F172A"/>
-                </a:solidFill>
-                <a:latin typeface="Calibri"/>
-              </a:rPr>
-              <a:t>Weapons</a:t>
-            </a:r>
-            <a:endParaRPr sz="680" b="1" dirty="0">
-              <a:solidFill>
-                <a:srgbClr val="0F172A"/>
-              </a:solidFill>
-              <a:latin typeface="Calibri"/>
-            </a:endParaRPr>
-          </a:p>
-        </p:txBody>
-      </p:sp>
-      <p:sp>
-        <p:nvSpPr>
-          <p:cNvPr id="56" name="Rounded Rectangle 276">
-            <a:extLst>
-              <a:ext uri="{FF2B5EF4-FFF2-40B4-BE49-F238E27FC236}">
-                <a16:creationId xmlns:a16="http://schemas.microsoft.com/office/drawing/2014/main" id="{BC8343A3-1966-4556-AA7B-A547C9C468E3}"/>
-              </a:ext>
-            </a:extLst>
-          </p:cNvPr>
-          <p:cNvSpPr/>
-          <p:nvPr/>
-        </p:nvSpPr>
-        <p:spPr>
-          <a:xfrm>
-            <a:off x="2034539" y="2762061"/>
-            <a:ext cx="1216152" cy="274320"/>
-          </a:xfrm>
-          <a:prstGeom prst="roundRect">
-            <a:avLst/>
-          </a:prstGeom>
-          <a:solidFill>
-            <a:srgbClr val="F1F5F9"/>
-          </a:solidFill>
-          <a:ln w="9525">
-            <a:solidFill>
-              <a:srgbClr val="CBD5E1"/>
-            </a:solidFill>
-          </a:ln>
-        </p:spPr>
-        <p:style>
-          <a:lnRef idx="1">
-            <a:schemeClr val="accent1"/>
-          </a:lnRef>
-          <a:fillRef idx="3">
-            <a:schemeClr val="accent1"/>
-          </a:fillRef>
-          <a:effectRef idx="2">
-            <a:schemeClr val="accent1"/>
-          </a:effectRef>
-          <a:fontRef idx="minor">
-            <a:schemeClr val="lt1"/>
-          </a:fontRef>
-        </p:style>
-        <p:txBody>
-          <a:bodyPr lIns="36576" tIns="18288" rIns="36576" bIns="18288" rtlCol="0" anchor="ctr"/>
-          <a:lstStyle/>
-          <a:p>
-            <a:pPr algn="ctr"/>
-            <a:r>
-              <a:rPr lang="en-US" sz="680" b="1" dirty="0" err="1">
-                <a:solidFill>
-                  <a:srgbClr val="0F172A"/>
-                </a:solidFill>
-                <a:latin typeface="Calibri"/>
-              </a:rPr>
-              <a:t>Wargears</a:t>
-            </a:r>
-            <a:endParaRPr sz="680" b="1" dirty="0">
-              <a:solidFill>
-                <a:srgbClr val="0F172A"/>
-              </a:solidFill>
-              <a:latin typeface="Calibri"/>
-            </a:endParaRPr>
-          </a:p>
-        </p:txBody>
-      </p:sp>
-      <p:sp>
-        <p:nvSpPr>
-          <p:cNvPr id="57" name="Rounded Rectangle 267">
-            <a:extLst>
-              <a:ext uri="{FF2B5EF4-FFF2-40B4-BE49-F238E27FC236}">
-                <a16:creationId xmlns:a16="http://schemas.microsoft.com/office/drawing/2014/main" id="{4AE7707F-D41A-44DE-A194-AF52020C048B}"/>
-              </a:ext>
-            </a:extLst>
-          </p:cNvPr>
-          <p:cNvSpPr/>
-          <p:nvPr/>
-        </p:nvSpPr>
-        <p:spPr>
-          <a:xfrm>
-            <a:off x="2034539" y="2029968"/>
-            <a:ext cx="1216152" cy="274320"/>
-          </a:xfrm>
-          <a:prstGeom prst="roundRect">
-            <a:avLst/>
-          </a:prstGeom>
-          <a:solidFill>
-            <a:srgbClr val="ECFDF5"/>
-          </a:solidFill>
-          <a:ln w="9525">
-            <a:solidFill>
-              <a:srgbClr val="CBD5E1"/>
-            </a:solidFill>
-          </a:ln>
-        </p:spPr>
-        <p:style>
-          <a:lnRef idx="1">
-            <a:schemeClr val="accent1"/>
-          </a:lnRef>
-          <a:fillRef idx="3">
-            <a:schemeClr val="accent1"/>
-          </a:fillRef>
-          <a:effectRef idx="2">
-            <a:schemeClr val="accent1"/>
-          </a:effectRef>
-          <a:fontRef idx="minor">
-            <a:schemeClr val="lt1"/>
-          </a:fontRef>
-        </p:style>
-        <p:txBody>
-          <a:bodyPr lIns="36576" tIns="18288" rIns="36576" bIns="18288" rtlCol="0" anchor="ctr"/>
-          <a:lstStyle/>
-          <a:p>
-            <a:pPr algn="ctr"/>
-            <a:r>
-              <a:rPr lang="en-US" sz="680" b="1" dirty="0" err="1">
-                <a:solidFill>
-                  <a:srgbClr val="0F172A"/>
-                </a:solidFill>
-                <a:latin typeface="Calibri"/>
-              </a:rPr>
-              <a:t>WeaponProfiles</a:t>
-            </a:r>
-            <a:endParaRPr sz="680" b="1" dirty="0">
-              <a:solidFill>
-                <a:srgbClr val="0F172A"/>
-              </a:solidFill>
-              <a:latin typeface="Calibri"/>
             </a:endParaRPr>
           </a:p>
         </p:txBody>
@@ -33134,7 +32276,7 @@
               <a:buNone/>
             </a:pPr>
             <a:r>
-              <a:rPr lang="en-US" sz="1550" b="0" i="0" u="none" strike="noStrike" cap="none">
+              <a:rPr lang="en-US" sz="1550" b="0" i="0" u="none" strike="noStrike" cap="none" dirty="0" err="1">
                 <a:solidFill>
                   <a:srgbClr val="374151"/>
                 </a:solidFill>
@@ -33143,9 +32285,177 @@
                 <a:cs typeface="Calibri"/>
                 <a:sym typeface="Calibri"/>
               </a:rPr>
-              <a:t>Принцип: UI не содержит расчётной логики; симуляция изолирована в сервисном слое.</a:t>
-            </a:r>
-            <a:endParaRPr sz="1550" b="0" i="0" u="none" strike="noStrike" cap="none">
+              <a:t>Принцип</a:t>
+            </a:r>
+            <a:r>
+              <a:rPr lang="en-US" sz="1550" b="0" i="0" u="none" strike="noStrike" cap="none" dirty="0">
+                <a:solidFill>
+                  <a:srgbClr val="374151"/>
+                </a:solidFill>
+                <a:latin typeface="Calibri"/>
+                <a:ea typeface="Calibri"/>
+                <a:cs typeface="Calibri"/>
+                <a:sym typeface="Calibri"/>
+              </a:rPr>
+              <a:t>: UI не </a:t>
+            </a:r>
+            <a:r>
+              <a:rPr lang="en-US" sz="1550" b="0" i="0" u="none" strike="noStrike" cap="none" dirty="0" err="1">
+                <a:solidFill>
+                  <a:srgbClr val="374151"/>
+                </a:solidFill>
+                <a:latin typeface="Calibri"/>
+                <a:ea typeface="Calibri"/>
+                <a:cs typeface="Calibri"/>
+                <a:sym typeface="Calibri"/>
+              </a:rPr>
+              <a:t>содержит</a:t>
+            </a:r>
+            <a:r>
+              <a:rPr lang="en-US" sz="1550" b="0" i="0" u="none" strike="noStrike" cap="none" dirty="0">
+                <a:solidFill>
+                  <a:srgbClr val="374151"/>
+                </a:solidFill>
+                <a:latin typeface="Calibri"/>
+                <a:ea typeface="Calibri"/>
+                <a:cs typeface="Calibri"/>
+                <a:sym typeface="Calibri"/>
+              </a:rPr>
+              <a:t> </a:t>
+            </a:r>
+            <a:r>
+              <a:rPr lang="en-US" sz="1550" b="0" i="0" u="none" strike="noStrike" cap="none" dirty="0" err="1">
+                <a:solidFill>
+                  <a:srgbClr val="374151"/>
+                </a:solidFill>
+                <a:latin typeface="Calibri"/>
+                <a:ea typeface="Calibri"/>
+                <a:cs typeface="Calibri"/>
+                <a:sym typeface="Calibri"/>
+              </a:rPr>
+              <a:t>расчётной</a:t>
+            </a:r>
+            <a:r>
+              <a:rPr lang="en-US" sz="1550" b="0" i="0" u="none" strike="noStrike" cap="none" dirty="0">
+                <a:solidFill>
+                  <a:srgbClr val="374151"/>
+                </a:solidFill>
+                <a:latin typeface="Calibri"/>
+                <a:ea typeface="Calibri"/>
+                <a:cs typeface="Calibri"/>
+                <a:sym typeface="Calibri"/>
+              </a:rPr>
+              <a:t> </a:t>
+            </a:r>
+            <a:r>
+              <a:rPr lang="en-US" sz="1550" b="0" i="0" u="none" strike="noStrike" cap="none" dirty="0" err="1">
+                <a:solidFill>
+                  <a:srgbClr val="374151"/>
+                </a:solidFill>
+                <a:latin typeface="Calibri"/>
+                <a:ea typeface="Calibri"/>
+                <a:cs typeface="Calibri"/>
+                <a:sym typeface="Calibri"/>
+              </a:rPr>
+              <a:t>логики</a:t>
+            </a:r>
+            <a:r>
+              <a:rPr lang="en-US" sz="1550" b="0" i="0" u="none" strike="noStrike" cap="none" dirty="0">
+                <a:solidFill>
+                  <a:srgbClr val="374151"/>
+                </a:solidFill>
+                <a:latin typeface="Calibri"/>
+                <a:ea typeface="Calibri"/>
+                <a:cs typeface="Calibri"/>
+                <a:sym typeface="Calibri"/>
+              </a:rPr>
+              <a:t>; </a:t>
+            </a:r>
+            <a:r>
+              <a:rPr lang="en-US" sz="1550" b="0" i="0" u="none" strike="noStrike" cap="none" dirty="0" err="1">
+                <a:solidFill>
+                  <a:srgbClr val="374151"/>
+                </a:solidFill>
+                <a:latin typeface="Calibri"/>
+                <a:ea typeface="Calibri"/>
+                <a:cs typeface="Calibri"/>
+                <a:sym typeface="Calibri"/>
+              </a:rPr>
+              <a:t>симуляция</a:t>
+            </a:r>
+            <a:r>
+              <a:rPr lang="en-US" sz="1550" b="0" i="0" u="none" strike="noStrike" cap="none" dirty="0">
+                <a:solidFill>
+                  <a:srgbClr val="374151"/>
+                </a:solidFill>
+                <a:latin typeface="Calibri"/>
+                <a:ea typeface="Calibri"/>
+                <a:cs typeface="Calibri"/>
+                <a:sym typeface="Calibri"/>
+              </a:rPr>
+              <a:t> </a:t>
+            </a:r>
+            <a:r>
+              <a:rPr lang="en-US" sz="1550" b="0" i="0" u="none" strike="noStrike" cap="none" dirty="0" err="1">
+                <a:solidFill>
+                  <a:srgbClr val="374151"/>
+                </a:solidFill>
+                <a:latin typeface="Calibri"/>
+                <a:ea typeface="Calibri"/>
+                <a:cs typeface="Calibri"/>
+                <a:sym typeface="Calibri"/>
+              </a:rPr>
+              <a:t>изолирована</a:t>
+            </a:r>
+            <a:r>
+              <a:rPr lang="en-US" sz="1550" b="0" i="0" u="none" strike="noStrike" cap="none" dirty="0">
+                <a:solidFill>
+                  <a:srgbClr val="374151"/>
+                </a:solidFill>
+                <a:latin typeface="Calibri"/>
+                <a:ea typeface="Calibri"/>
+                <a:cs typeface="Calibri"/>
+                <a:sym typeface="Calibri"/>
+              </a:rPr>
+              <a:t> в </a:t>
+            </a:r>
+            <a:r>
+              <a:rPr lang="en-US" sz="1550" b="0" i="0" u="none" strike="noStrike" cap="none" dirty="0" err="1">
+                <a:solidFill>
+                  <a:srgbClr val="374151"/>
+                </a:solidFill>
+                <a:latin typeface="Calibri"/>
+                <a:ea typeface="Calibri"/>
+                <a:cs typeface="Calibri"/>
+                <a:sym typeface="Calibri"/>
+              </a:rPr>
+              <a:t>сервисном</a:t>
+            </a:r>
+            <a:r>
+              <a:rPr lang="en-US" sz="1550" b="0" i="0" u="none" strike="noStrike" cap="none" dirty="0">
+                <a:solidFill>
+                  <a:srgbClr val="374151"/>
+                </a:solidFill>
+                <a:latin typeface="Calibri"/>
+                <a:ea typeface="Calibri"/>
+                <a:cs typeface="Calibri"/>
+                <a:sym typeface="Calibri"/>
+              </a:rPr>
+              <a:t> </a:t>
+            </a:r>
+            <a:r>
+              <a:rPr lang="en-US" sz="1550" b="0" i="0" u="none" strike="noStrike" cap="none" dirty="0" err="1">
+                <a:solidFill>
+                  <a:srgbClr val="374151"/>
+                </a:solidFill>
+                <a:latin typeface="Calibri"/>
+                <a:ea typeface="Calibri"/>
+                <a:cs typeface="Calibri"/>
+                <a:sym typeface="Calibri"/>
+              </a:rPr>
+              <a:t>слое</a:t>
+            </a:r>
+            <a:endParaRPr sz="1550" b="0" i="0" u="none" strike="noStrike" cap="none" dirty="0">
               <a:solidFill>
                 <a:schemeClr val="dk1"/>
               </a:solidFill>
